--- a/icbb-website/materials/research-methods/unit-10-slides.pptx
+++ b/icbb-website/materials/research-methods/unit-10-slides.pptx
@@ -967,7 +967,7 @@
           <a:p>
             <a:r>
               <a:rPr lang="en-US" dirty="0"/>
-              <a:t>Take-away: A good limitation names the threat, its direction, and what you did about it. Examiners reward the researcher who saw the problem first.</a:t>
+              <a:t>The point: A good limitation names the threat, its direction, and what you did about it. Examiners reward the researcher who saw the problem first.</a:t>
             </a:r>
             <a:endParaRPr lang="en-US" dirty="0"/>
           </a:p>
@@ -1055,7 +1055,7 @@
           <a:p>
             <a:r>
               <a:rPr lang="en-US" dirty="0"/>
-              <a:t>Take-away: Build the schedule backwards from the deadline and put the dependencies in a Gantt chart. Most overruns are visible at proposal stage to anyone who does the arithmetic.</a:t>
+              <a:t>The point: Build the schedule backwards from the deadline and put the dependencies in a Gantt chart. Most overruns are visible at proposal stage to anyone who does the arithmetic.</a:t>
             </a:r>
             <a:endParaRPr lang="en-US" dirty="0"/>
           </a:p>
@@ -1407,7 +1407,7 @@
           <a:p>
             <a:r>
               <a:rPr lang="en-US" dirty="0"/>
-              <a:t>Read these out at the start and return to them at the end of the unit.</a:t>
+              <a:t>Read these at the start, and return to them at the end of the unit.</a:t>
             </a:r>
             <a:endParaRPr lang="en-US" dirty="0"/>
           </a:p>
@@ -2127,14 +2127,14 @@
         </p:nvSpPr>
         <p:spPr>
           <a:xfrm>
-            <a:off x="0" y="0"/>
-            <a:ext cx="118872" cy="5148072"/>
+            <a:off x="566928" y="4590288"/>
+            <a:ext cx="8010144" cy="10973"/>
           </a:xfrm>
           <a:prstGeom prst="rect">
             <a:avLst/>
           </a:prstGeom>
           <a:solidFill>
-            <a:srgbClr val="0066CC"/>
+            <a:srgbClr val="D8D3CB"/>
           </a:solidFill>
           <a:ln/>
         </p:spPr>
@@ -2149,7 +2149,7 @@
         </p:nvPicPr>
         <p:blipFill>
           <a:blip r:embed="rId1">
-            <a:alphaModFix amt="18000"/>
+            <a:alphaModFix amt="38000"/>
           </a:blip>
           <a:stretch>
             <a:fillRect/>
@@ -2157,8 +2157,8 @@
         </p:blipFill>
         <p:spPr>
           <a:xfrm>
-            <a:off x="6903720" y="3977640"/>
-            <a:ext cx="1920240" cy="1280160"/>
+            <a:off x="7973568" y="4709160"/>
+            <a:ext cx="566928" cy="374904"/>
           </a:xfrm>
           <a:prstGeom prst="rect">
             <a:avLst/>
@@ -2177,8 +2177,8 @@
         </p:nvSpPr>
         <p:spPr>
           <a:xfrm>
-            <a:off x="8503920" y="4709160"/>
-            <a:ext cx="800000" cy="300000"/>
+            <a:off x="566928" y="4700016"/>
+            <a:ext cx="914400" cy="274320"/>
           </a:xfrm>
           <a:prstGeom prst="rect">
             <a:avLst/>
@@ -2193,10 +2193,13 @@
           <a:bodyPr/>
           <a:lstStyle>
             <a:lvl1pPr>
-              <a:defRPr sz="1000">
-                <a:solidFill>
-                  <a:srgbClr val="6B7280"/>
-                </a:solidFill>
+              <a:defRPr sz="900">
+                <a:solidFill>
+                  <a:srgbClr val="5F6B76"/>
+                </a:solidFill>
+                <a:latin typeface="Corbel"/>
+                <a:ea typeface="Corbel"/>
+                <a:cs typeface="Corbel"/>
               </a:defRPr>
             </a:lvl1pPr>
           </a:lstStyle>
@@ -2224,7 +2227,7 @@
     <p:bg>
       <p:bgPr>
         <a:solidFill>
-          <a:srgbClr val="004D99"/>
+          <a:srgbClr val="132330"/>
         </a:solidFill>
       </p:bgPr>
     </p:bg>
@@ -2250,14 +2253,14 @@
         </p:nvSpPr>
         <p:spPr>
           <a:xfrm>
-            <a:off x="0" y="4526280"/>
-            <a:ext cx="9144000" cy="621792"/>
+            <a:off x="685800" y="1481328"/>
+            <a:ext cx="1051560" cy="25603"/>
           </a:xfrm>
           <a:prstGeom prst="rect">
             <a:avLst/>
           </a:prstGeom>
           <a:solidFill>
-            <a:srgbClr val="00A86B"/>
+            <a:srgbClr val="9A6A3C"/>
           </a:solidFill>
           <a:ln/>
         </p:spPr>
@@ -2272,7 +2275,7 @@
         </p:nvPicPr>
         <p:blipFill>
           <a:blip r:embed="rId1">
-            <a:alphaModFix amt="75000"/>
+            <a:alphaModFix amt="45000"/>
           </a:blip>
           <a:stretch>
             <a:fillRect/>
@@ -2280,8 +2283,8 @@
         </p:blipFill>
         <p:spPr>
           <a:xfrm>
-            <a:off x="7452360" y="384048"/>
-            <a:ext cx="1371600" cy="914400"/>
+            <a:off x="7863840" y="4315968"/>
+            <a:ext cx="676656" cy="448056"/>
           </a:xfrm>
           <a:prstGeom prst="rect">
             <a:avLst/>
@@ -2325,8 +2328,8 @@
         </p:nvSpPr>
         <p:spPr>
           <a:xfrm>
-            <a:off x="8503920" y="4709160"/>
-            <a:ext cx="800000" cy="300000"/>
+            <a:off x="566928" y="4700016"/>
+            <a:ext cx="914400" cy="274320"/>
           </a:xfrm>
           <a:prstGeom prst="rect">
             <a:avLst/>
@@ -2341,10 +2344,13 @@
           <a:bodyPr/>
           <a:lstStyle>
             <a:lvl1pPr>
-              <a:defRPr sz="1000">
-                <a:solidFill>
-                  <a:srgbClr val="6B7280"/>
-                </a:solidFill>
+              <a:defRPr sz="900">
+                <a:solidFill>
+                  <a:srgbClr val="5F6B76"/>
+                </a:solidFill>
+                <a:latin typeface="Corbel"/>
+                <a:ea typeface="Corbel"/>
+                <a:cs typeface="Corbel"/>
               </a:defRPr>
             </a:lvl1pPr>
           </a:lstStyle>
@@ -2645,8 +2651,8 @@
         </p:nvSpPr>
         <p:spPr>
           <a:xfrm>
-            <a:off x="548640" y="1005840"/>
-            <a:ext cx="6675120" cy="274320"/>
+            <a:off x="685800" y="1024128"/>
+            <a:ext cx="6766560" cy="292608"/>
           </a:xfrm>
           <a:prstGeom prst="rect">
             <a:avLst/>
@@ -2662,14 +2668,17 @@
               <a:buNone/>
             </a:pPr>
             <a:r>
-              <a:rPr lang="en-US" sz="1200" b="1" spc="200" kern="0" dirty="0">
-                <a:solidFill>
-                  <a:srgbClr val="00A86B"/>
-                </a:solidFill>
-              </a:rPr>
-              <a:t>ICBB-RM101  ·  UNIT 10 OF 10</a:t>
-            </a:r>
-            <a:endParaRPr lang="en-US" sz="1200" dirty="0"/>
+              <a:rPr lang="en-US" sz="1150" spc="240" kern="0" dirty="0">
+                <a:solidFill>
+                  <a:srgbClr val="C8A67B"/>
+                </a:solidFill>
+                <a:latin typeface="Corbel" pitchFamily="34" charset="0"/>
+                <a:ea typeface="Corbel" pitchFamily="34" charset="-122"/>
+                <a:cs typeface="Corbel" pitchFamily="34" charset="-120"/>
+              </a:rPr>
+              <a:t>ICBB-RM101   ·   Unit 10 of 10</a:t>
+            </a:r>
+            <a:endParaRPr lang="en-US" sz="1150" dirty="0"/>
           </a:p>
         </p:txBody>
       </p:sp>
@@ -2681,8 +2690,8 @@
         </p:nvSpPr>
         <p:spPr>
           <a:xfrm>
-            <a:off x="548640" y="1371600"/>
-            <a:ext cx="6766560" cy="1371600"/>
+            <a:off x="685800" y="1700784"/>
+            <a:ext cx="6858000" cy="1417320"/>
           </a:xfrm>
           <a:prstGeom prst="rect">
             <a:avLst/>
@@ -2695,17 +2704,23 @@
           <a:lstStyle/>
           <a:p>
             <a:pPr indent="0" marL="0">
+              <a:lnSpc>
+                <a:spcPct val="102000"/>
+              </a:lnSpc>
               <a:buNone/>
             </a:pPr>
             <a:r>
-              <a:rPr lang="en-US" sz="3400" b="1" dirty="0">
+              <a:rPr lang="en-US" sz="3300" dirty="0">
                 <a:solidFill>
                   <a:srgbClr val="FFFFFF"/>
                 </a:solidFill>
+                <a:latin typeface="Constantia" pitchFamily="34" charset="0"/>
+                <a:ea typeface="Constantia" pitchFamily="34" charset="-122"/>
+                <a:cs typeface="Constantia" pitchFamily="34" charset="-120"/>
               </a:rPr>
               <a:t>Writing the Proposal, Rigour and Dissemination</a:t>
             </a:r>
-            <a:endParaRPr lang="en-US" sz="3400" dirty="0"/>
+            <a:endParaRPr lang="en-US" sz="3300" dirty="0"/>
           </a:p>
         </p:txBody>
       </p:sp>
@@ -2717,8 +2732,8 @@
         </p:nvSpPr>
         <p:spPr>
           <a:xfrm>
-            <a:off x="548640" y="2788920"/>
-            <a:ext cx="6766560" cy="1188720"/>
+            <a:off x="685800" y="3127248"/>
+            <a:ext cx="6309360" cy="1051560"/>
           </a:xfrm>
           <a:prstGeom prst="rect">
             <a:avLst/>
@@ -2732,19 +2747,22 @@
           <a:p>
             <a:pPr indent="0" marL="0">
               <a:lnSpc>
-                <a:spcPct val="120000"/>
+                <a:spcPct val="128000"/>
               </a:lnSpc>
               <a:buNone/>
             </a:pPr>
             <a:r>
-              <a:rPr lang="en-US" sz="1400" dirty="0">
-                <a:solidFill>
-                  <a:srgbClr val="DCE7F5"/>
-                </a:solidFill>
+              <a:rPr lang="en-US" sz="1350" dirty="0">
+                <a:solidFill>
+                  <a:srgbClr val="B9C2CB"/>
+                </a:solidFill>
+                <a:latin typeface="Corbel" pitchFamily="34" charset="0"/>
+                <a:ea typeface="Corbel" pitchFamily="34" charset="-122"/>
+                <a:cs typeface="Corbel" pitchFamily="34" charset="-120"/>
               </a:rPr>
               <a:t>Assembling everything into a proposal that will be approved and funded, building in rigour rather than claiming it, and planning how findings will reach the people who can act on them.</a:t>
             </a:r>
-            <a:endParaRPr lang="en-US" sz="1400" dirty="0"/>
+            <a:endParaRPr lang="en-US" sz="1350" dirty="0"/>
           </a:p>
         </p:txBody>
       </p:sp>
@@ -2756,8 +2774,8 @@
         </p:nvSpPr>
         <p:spPr>
           <a:xfrm>
-            <a:off x="548640" y="4645152"/>
-            <a:ext cx="5486400" cy="365760"/>
+            <a:off x="685800" y="4407408"/>
+            <a:ext cx="4572000" cy="274320"/>
           </a:xfrm>
           <a:prstGeom prst="rect">
             <a:avLst/>
@@ -2773,14 +2791,17 @@
               <a:buNone/>
             </a:pPr>
             <a:r>
-              <a:rPr lang="en-US" sz="1200" b="1" dirty="0">
-                <a:solidFill>
-                  <a:srgbClr val="FFFFFF"/>
-                </a:solidFill>
-              </a:rPr>
-              <a:t>Jesse Anak  ·  ICBB</a:t>
-            </a:r>
-            <a:endParaRPr lang="en-US" sz="1200" dirty="0"/>
+              <a:rPr lang="en-US" sz="1050" spc="120" kern="0" dirty="0">
+                <a:solidFill>
+                  <a:srgbClr val="8894A0"/>
+                </a:solidFill>
+                <a:latin typeface="Corbel" pitchFamily="34" charset="0"/>
+                <a:ea typeface="Corbel" pitchFamily="34" charset="-122"/>
+                <a:cs typeface="Corbel" pitchFamily="34" charset="-120"/>
+              </a:rPr>
+              <a:t>Jesse Anak   ·   ICBB</a:t>
+            </a:r>
+            <a:endParaRPr lang="en-US" sz="1050" dirty="0"/>
           </a:p>
         </p:txBody>
       </p:sp>
@@ -2817,8 +2838,8 @@
         </p:nvSpPr>
         <p:spPr>
           <a:xfrm>
-            <a:off x="502920" y="292608"/>
-            <a:ext cx="8046720" cy="228600"/>
+            <a:off x="566928" y="384048"/>
+            <a:ext cx="7772400" cy="237744"/>
           </a:xfrm>
           <a:prstGeom prst="rect">
             <a:avLst/>
@@ -2834,14 +2855,17 @@
               <a:buNone/>
             </a:pPr>
             <a:r>
-              <a:rPr lang="en-US" sz="1100" b="1" spc="150" kern="0" dirty="0">
-                <a:solidFill>
-                  <a:srgbClr val="0066CC"/>
-                </a:solidFill>
+              <a:rPr lang="en-US" sz="1000" spc="200" kern="0" dirty="0">
+                <a:solidFill>
+                  <a:srgbClr val="9A6A3C"/>
+                </a:solidFill>
+                <a:latin typeface="Corbel" pitchFamily="34" charset="0"/>
+                <a:ea typeface="Corbel" pitchFamily="34" charset="-122"/>
+                <a:cs typeface="Corbel" pitchFamily="34" charset="-120"/>
               </a:rPr>
               <a:t>UNIT 10</a:t>
             </a:r>
-            <a:endParaRPr lang="en-US" sz="1100" dirty="0"/>
+            <a:endParaRPr lang="en-US" sz="1000" dirty="0"/>
           </a:p>
         </p:txBody>
       </p:sp>
@@ -2853,8 +2877,8 @@
         </p:nvSpPr>
         <p:spPr>
           <a:xfrm>
-            <a:off x="502920" y="548640"/>
-            <a:ext cx="8046720" cy="640080"/>
+            <a:off x="566928" y="658368"/>
+            <a:ext cx="7772400" cy="658368"/>
           </a:xfrm>
           <a:prstGeom prst="rect">
             <a:avLst/>
@@ -2867,30 +2891,56 @@
           <a:lstStyle/>
           <a:p>
             <a:pPr indent="0" marL="0">
+              <a:lnSpc>
+                <a:spcPct val="100000"/>
+              </a:lnSpc>
               <a:buNone/>
             </a:pPr>
             <a:r>
-              <a:rPr lang="en-US" sz="2400" b="1" dirty="0">
-                <a:solidFill>
-                  <a:srgbClr val="111827"/>
-                </a:solidFill>
+              <a:rPr lang="en-US" sz="2500" dirty="0">
+                <a:solidFill>
+                  <a:srgbClr val="1C3140"/>
+                </a:solidFill>
+                <a:latin typeface="Constantia" pitchFamily="34" charset="0"/>
+                <a:ea typeface="Constantia" pitchFamily="34" charset="-122"/>
+                <a:cs typeface="Constantia" pitchFamily="34" charset="-120"/>
               </a:rPr>
               <a:t>Rigour and limitations (1/2)</a:t>
             </a:r>
-            <a:endParaRPr lang="en-US" sz="2400" dirty="0"/>
-          </a:p>
-        </p:txBody>
-      </p:sp>
-      <p:sp>
-        <p:nvSpPr>
-          <p:cNvPr id="4" name="Text 2"/>
+            <a:endParaRPr lang="en-US" sz="2500" dirty="0"/>
+          </a:p>
+        </p:txBody>
+      </p:sp>
+      <p:sp>
+        <p:nvSpPr>
+          <p:cNvPr id="4" name="Shape 2"/>
           <p:cNvSpPr/>
           <p:nvPr/>
         </p:nvSpPr>
         <p:spPr>
           <a:xfrm>
-            <a:off x="685800" y="1325880"/>
-            <a:ext cx="7772400" cy="3200400"/>
+            <a:off x="566928" y="1335024"/>
+            <a:ext cx="566928" cy="20117"/>
+          </a:xfrm>
+          <a:prstGeom prst="rect">
+            <a:avLst/>
+          </a:prstGeom>
+          <a:solidFill>
+            <a:srgbClr val="9A6A3C"/>
+          </a:solidFill>
+          <a:ln/>
+        </p:spPr>
+      </p:sp>
+      <p:sp>
+        <p:nvSpPr>
+          <p:cNvPr id="5" name="Text 3"/>
+          <p:cNvSpPr/>
+          <p:nvPr/>
+        </p:nvSpPr>
+        <p:spPr>
+          <a:xfrm>
+            <a:off x="713232" y="1664208"/>
+            <a:ext cx="7498080" cy="2788920"/>
           </a:xfrm>
           <a:prstGeom prst="rect">
             <a:avLst/>
@@ -2904,19 +2954,22 @@
           <a:p>
             <a:pPr marL="342900" indent="-342900">
               <a:lnSpc>
-                <a:spcPct val="125000"/>
+                <a:spcPct val="130000"/>
               </a:lnSpc>
               <a:spcAft>
-                <a:spcPts val="800"/>
+                <a:spcPts val="1100"/>
               </a:spcAft>
               <a:buSzPct val="100000"/>
-              <a:buChar char="•"/>
+              <a:buChar char="–"/>
             </a:pPr>
             <a:r>
               <a:rPr lang="en-US" sz="1500" dirty="0">
                 <a:solidFill>
-                  <a:srgbClr val="374151"/>
-                </a:solidFill>
+                  <a:srgbClr val="23282E"/>
+                </a:solidFill>
+                <a:latin typeface="Corbel" pitchFamily="34" charset="0"/>
+                <a:ea typeface="Corbel" pitchFamily="34" charset="-122"/>
+                <a:cs typeface="Corbel" pitchFamily="34" charset="-120"/>
               </a:rPr>
               <a:t>Rigour is designed in, not asserted at the end</a:t>
             </a:r>
@@ -2925,19 +2978,22 @@
           <a:p>
             <a:pPr marL="342900" indent="-342900">
               <a:lnSpc>
-                <a:spcPct val="125000"/>
+                <a:spcPct val="130000"/>
               </a:lnSpc>
               <a:spcAft>
-                <a:spcPts val="800"/>
+                <a:spcPts val="1100"/>
               </a:spcAft>
               <a:buSzPct val="100000"/>
-              <a:buChar char="•"/>
+              <a:buChar char="–"/>
             </a:pPr>
             <a:r>
               <a:rPr lang="en-US" sz="1500" dirty="0">
                 <a:solidFill>
-                  <a:srgbClr val="374151"/>
-                </a:solidFill>
+                  <a:srgbClr val="23282E"/>
+                </a:solidFill>
+                <a:latin typeface="Corbel" pitchFamily="34" charset="0"/>
+                <a:ea typeface="Corbel" pitchFamily="34" charset="-122"/>
+                <a:cs typeface="Corbel" pitchFamily="34" charset="-120"/>
               </a:rPr>
               <a:t>Quantitative: adequate power, valid instruments, control of confounding, pre-specified analysis, appropriate handling of missing data</a:t>
             </a:r>
@@ -2946,19 +3002,22 @@
           <a:p>
             <a:pPr marL="342900" indent="-342900">
               <a:lnSpc>
-                <a:spcPct val="125000"/>
+                <a:spcPct val="130000"/>
               </a:lnSpc>
               <a:spcAft>
-                <a:spcPts val="800"/>
+                <a:spcPts val="1100"/>
               </a:spcAft>
               <a:buSzPct val="100000"/>
-              <a:buChar char="•"/>
+              <a:buChar char="–"/>
             </a:pPr>
             <a:r>
               <a:rPr lang="en-US" sz="1500" dirty="0">
                 <a:solidFill>
-                  <a:srgbClr val="374151"/>
-                </a:solidFill>
+                  <a:srgbClr val="23282E"/>
+                </a:solidFill>
+                <a:latin typeface="Corbel" pitchFamily="34" charset="0"/>
+                <a:ea typeface="Corbel" pitchFamily="34" charset="-122"/>
+                <a:cs typeface="Corbel" pitchFamily="34" charset="-120"/>
               </a:rPr>
               <a:t>Qualitative: audit trail, reflexivity, triangulation, thick description, transparent coding</a:t>
             </a:r>
@@ -2967,19 +3026,22 @@
           <a:p>
             <a:pPr marL="342900" indent="-342900">
               <a:lnSpc>
-                <a:spcPct val="125000"/>
+                <a:spcPct val="130000"/>
               </a:lnSpc>
               <a:spcAft>
-                <a:spcPts val="800"/>
+                <a:spcPts val="1100"/>
               </a:spcAft>
               <a:buSzPct val="100000"/>
-              <a:buChar char="•"/>
+              <a:buChar char="–"/>
             </a:pPr>
             <a:r>
               <a:rPr lang="en-US" sz="1500" dirty="0">
                 <a:solidFill>
-                  <a:srgbClr val="374151"/>
-                </a:solidFill>
+                  <a:srgbClr val="23282E"/>
+                </a:solidFill>
+                <a:latin typeface="Corbel" pitchFamily="34" charset="0"/>
+                <a:ea typeface="Corbel" pitchFamily="34" charset="-122"/>
+                <a:cs typeface="Corbel" pitchFamily="34" charset="-120"/>
               </a:rPr>
               <a:t>Limitations should name the threat, its likely direction, and what you did to reduce it</a:t>
             </a:r>
@@ -2999,8 +3061,8 @@
         </p:nvSpPr>
         <p:spPr>
           <a:xfrm>
-            <a:off x="8503920" y="4709160"/>
-            <a:ext cx="800000" cy="300000"/>
+            <a:off x="566928" y="4700016"/>
+            <a:ext cx="914400" cy="274320"/>
           </a:xfrm>
           <a:prstGeom prst="rect">
             <a:avLst/>
@@ -3015,10 +3077,13 @@
           <a:bodyPr/>
           <a:lstStyle>
             <a:lvl1pPr>
-              <a:defRPr sz="1000">
-                <a:solidFill>
-                  <a:srgbClr val="6B7280"/>
-                </a:solidFill>
+              <a:defRPr sz="900">
+                <a:solidFill>
+                  <a:srgbClr val="5F6B76"/>
+                </a:solidFill>
+                <a:latin typeface="Corbel"/>
+                <a:ea typeface="Corbel"/>
+                <a:cs typeface="Corbel"/>
               </a:defRPr>
             </a:lvl1pPr>
           </a:lstStyle>
@@ -3065,8 +3130,8 @@
         </p:nvSpPr>
         <p:spPr>
           <a:xfrm>
-            <a:off x="502920" y="292608"/>
-            <a:ext cx="8046720" cy="228600"/>
+            <a:off x="566928" y="384048"/>
+            <a:ext cx="7772400" cy="237744"/>
           </a:xfrm>
           <a:prstGeom prst="rect">
             <a:avLst/>
@@ -3082,14 +3147,17 @@
               <a:buNone/>
             </a:pPr>
             <a:r>
-              <a:rPr lang="en-US" sz="1100" b="1" spc="150" kern="0" dirty="0">
-                <a:solidFill>
-                  <a:srgbClr val="0066CC"/>
-                </a:solidFill>
+              <a:rPr lang="en-US" sz="1000" spc="200" kern="0" dirty="0">
+                <a:solidFill>
+                  <a:srgbClr val="9A6A3C"/>
+                </a:solidFill>
+                <a:latin typeface="Corbel" pitchFamily="34" charset="0"/>
+                <a:ea typeface="Corbel" pitchFamily="34" charset="-122"/>
+                <a:cs typeface="Corbel" pitchFamily="34" charset="-120"/>
               </a:rPr>
               <a:t>UNIT 10</a:t>
             </a:r>
-            <a:endParaRPr lang="en-US" sz="1100" dirty="0"/>
+            <a:endParaRPr lang="en-US" sz="1000" dirty="0"/>
           </a:p>
         </p:txBody>
       </p:sp>
@@ -3101,8 +3169,8 @@
         </p:nvSpPr>
         <p:spPr>
           <a:xfrm>
-            <a:off x="502920" y="548640"/>
-            <a:ext cx="8046720" cy="640080"/>
+            <a:off x="566928" y="658368"/>
+            <a:ext cx="7772400" cy="658368"/>
           </a:xfrm>
           <a:prstGeom prst="rect">
             <a:avLst/>
@@ -3115,30 +3183,56 @@
           <a:lstStyle/>
           <a:p>
             <a:pPr indent="0" marL="0">
+              <a:lnSpc>
+                <a:spcPct val="100000"/>
+              </a:lnSpc>
               <a:buNone/>
             </a:pPr>
             <a:r>
-              <a:rPr lang="en-US" sz="2400" b="1" dirty="0">
-                <a:solidFill>
-                  <a:srgbClr val="111827"/>
-                </a:solidFill>
+              <a:rPr lang="en-US" sz="2500" dirty="0">
+                <a:solidFill>
+                  <a:srgbClr val="1C3140"/>
+                </a:solidFill>
+                <a:latin typeface="Constantia" pitchFamily="34" charset="0"/>
+                <a:ea typeface="Constantia" pitchFamily="34" charset="-122"/>
+                <a:cs typeface="Constantia" pitchFamily="34" charset="-120"/>
               </a:rPr>
               <a:t>Rigour and limitations (2/2)</a:t>
             </a:r>
-            <a:endParaRPr lang="en-US" sz="2400" dirty="0"/>
-          </a:p>
-        </p:txBody>
-      </p:sp>
-      <p:sp>
-        <p:nvSpPr>
-          <p:cNvPr id="4" name="Text 2"/>
+            <a:endParaRPr lang="en-US" sz="2500" dirty="0"/>
+          </a:p>
+        </p:txBody>
+      </p:sp>
+      <p:sp>
+        <p:nvSpPr>
+          <p:cNvPr id="4" name="Shape 2"/>
           <p:cNvSpPr/>
           <p:nvPr/>
         </p:nvSpPr>
         <p:spPr>
           <a:xfrm>
-            <a:off x="685800" y="1325880"/>
-            <a:ext cx="7772400" cy="3200400"/>
+            <a:off x="566928" y="1335024"/>
+            <a:ext cx="566928" cy="20117"/>
+          </a:xfrm>
+          <a:prstGeom prst="rect">
+            <a:avLst/>
+          </a:prstGeom>
+          <a:solidFill>
+            <a:srgbClr val="9A6A3C"/>
+          </a:solidFill>
+          <a:ln/>
+        </p:spPr>
+      </p:sp>
+      <p:sp>
+        <p:nvSpPr>
+          <p:cNvPr id="5" name="Text 3"/>
+          <p:cNvSpPr/>
+          <p:nvPr/>
+        </p:nvSpPr>
+        <p:spPr>
+          <a:xfrm>
+            <a:off x="713232" y="1664208"/>
+            <a:ext cx="7498080" cy="2788920"/>
           </a:xfrm>
           <a:prstGeom prst="rect">
             <a:avLst/>
@@ -3152,19 +3246,22 @@
           <a:p>
             <a:pPr marL="342900" indent="-342900">
               <a:lnSpc>
-                <a:spcPct val="125000"/>
+                <a:spcPct val="130000"/>
               </a:lnSpc>
               <a:spcAft>
-                <a:spcPts val="800"/>
+                <a:spcPts val="1100"/>
               </a:spcAft>
               <a:buSzPct val="100000"/>
-              <a:buChar char="•"/>
+              <a:buChar char="–"/>
             </a:pPr>
             <a:r>
               <a:rPr lang="en-US" sz="1500" dirty="0">
                 <a:solidFill>
-                  <a:srgbClr val="374151"/>
-                </a:solidFill>
+                  <a:srgbClr val="23282E"/>
+                </a:solidFill>
+                <a:latin typeface="Corbel" pitchFamily="34" charset="0"/>
+                <a:ea typeface="Corbel" pitchFamily="34" charset="-122"/>
+                <a:cs typeface="Corbel" pitchFamily="34" charset="-120"/>
               </a:rPr>
               <a:t>"Time and financial constraints" is not a limitation; a convenience sample that may over-represent urban, literate respondents is</a:t>
             </a:r>
@@ -3173,19 +3270,22 @@
           <a:p>
             <a:pPr marL="342900" indent="-342900">
               <a:lnSpc>
-                <a:spcPct val="125000"/>
+                <a:spcPct val="130000"/>
               </a:lnSpc>
               <a:spcAft>
-                <a:spcPts val="800"/>
+                <a:spcPts val="1100"/>
               </a:spcAft>
               <a:buSzPct val="100000"/>
-              <a:buChar char="•"/>
+              <a:buChar char="–"/>
             </a:pPr>
             <a:r>
               <a:rPr lang="en-US" sz="1500" dirty="0">
                 <a:solidFill>
-                  <a:srgbClr val="374151"/>
-                </a:solidFill>
+                  <a:srgbClr val="23282E"/>
+                </a:solidFill>
+                <a:latin typeface="Corbel" pitchFamily="34" charset="0"/>
+                <a:ea typeface="Corbel" pitchFamily="34" charset="-122"/>
+                <a:cs typeface="Corbel" pitchFamily="34" charset="-120"/>
               </a:rPr>
               <a:t>Do not list limitations so severe they undermine the study — if one does, redesign rather than disclose and proceed</a:t>
             </a:r>
@@ -3205,8 +3305,8 @@
         </p:nvSpPr>
         <p:spPr>
           <a:xfrm>
-            <a:off x="8503920" y="4709160"/>
-            <a:ext cx="800000" cy="300000"/>
+            <a:off x="566928" y="4700016"/>
+            <a:ext cx="914400" cy="274320"/>
           </a:xfrm>
           <a:prstGeom prst="rect">
             <a:avLst/>
@@ -3221,10 +3321,13 @@
           <a:bodyPr/>
           <a:lstStyle>
             <a:lvl1pPr>
-              <a:defRPr sz="1000">
-                <a:solidFill>
-                  <a:srgbClr val="6B7280"/>
-                </a:solidFill>
+              <a:defRPr sz="900">
+                <a:solidFill>
+                  <a:srgbClr val="5F6B76"/>
+                </a:solidFill>
+                <a:latin typeface="Corbel"/>
+                <a:ea typeface="Corbel"/>
+                <a:cs typeface="Corbel"/>
               </a:defRPr>
             </a:lvl1pPr>
           </a:lstStyle>
@@ -3271,8 +3374,8 @@
         </p:nvSpPr>
         <p:spPr>
           <a:xfrm>
-            <a:off x="502920" y="292608"/>
-            <a:ext cx="8046720" cy="228600"/>
+            <a:off x="566928" y="384048"/>
+            <a:ext cx="7772400" cy="237744"/>
           </a:xfrm>
           <a:prstGeom prst="rect">
             <a:avLst/>
@@ -3288,14 +3391,17 @@
               <a:buNone/>
             </a:pPr>
             <a:r>
-              <a:rPr lang="en-US" sz="1100" b="1" spc="150" kern="0" dirty="0">
-                <a:solidFill>
-                  <a:srgbClr val="0066CC"/>
-                </a:solidFill>
+              <a:rPr lang="en-US" sz="1000" spc="200" kern="0" dirty="0">
+                <a:solidFill>
+                  <a:srgbClr val="9A6A3C"/>
+                </a:solidFill>
+                <a:latin typeface="Corbel" pitchFamily="34" charset="0"/>
+                <a:ea typeface="Corbel" pitchFamily="34" charset="-122"/>
+                <a:cs typeface="Corbel" pitchFamily="34" charset="-120"/>
               </a:rPr>
               <a:t>UNIT 10</a:t>
             </a:r>
-            <a:endParaRPr lang="en-US" sz="1100" dirty="0"/>
+            <a:endParaRPr lang="en-US" sz="1000" dirty="0"/>
           </a:p>
         </p:txBody>
       </p:sp>
@@ -3307,8 +3413,8 @@
         </p:nvSpPr>
         <p:spPr>
           <a:xfrm>
-            <a:off x="502920" y="548640"/>
-            <a:ext cx="8046720" cy="640080"/>
+            <a:off x="566928" y="658368"/>
+            <a:ext cx="7772400" cy="658368"/>
           </a:xfrm>
           <a:prstGeom prst="rect">
             <a:avLst/>
@@ -3321,30 +3427,56 @@
           <a:lstStyle/>
           <a:p>
             <a:pPr indent="0" marL="0">
+              <a:lnSpc>
+                <a:spcPct val="100000"/>
+              </a:lnSpc>
               <a:buNone/>
             </a:pPr>
             <a:r>
-              <a:rPr lang="en-US" sz="2400" b="1" dirty="0">
-                <a:solidFill>
-                  <a:srgbClr val="111827"/>
-                </a:solidFill>
+              <a:rPr lang="en-US" sz="2500" dirty="0">
+                <a:solidFill>
+                  <a:srgbClr val="1C3140"/>
+                </a:solidFill>
+                <a:latin typeface="Constantia" pitchFamily="34" charset="0"/>
+                <a:ea typeface="Constantia" pitchFamily="34" charset="-122"/>
+                <a:cs typeface="Constantia" pitchFamily="34" charset="-120"/>
               </a:rPr>
               <a:t>Data management and dissemination (1/2)</a:t>
             </a:r>
-            <a:endParaRPr lang="en-US" sz="2400" dirty="0"/>
-          </a:p>
-        </p:txBody>
-      </p:sp>
-      <p:sp>
-        <p:nvSpPr>
-          <p:cNvPr id="4" name="Text 2"/>
+            <a:endParaRPr lang="en-US" sz="2500" dirty="0"/>
+          </a:p>
+        </p:txBody>
+      </p:sp>
+      <p:sp>
+        <p:nvSpPr>
+          <p:cNvPr id="4" name="Shape 2"/>
           <p:cNvSpPr/>
           <p:nvPr/>
         </p:nvSpPr>
         <p:spPr>
           <a:xfrm>
-            <a:off x="685800" y="1325880"/>
-            <a:ext cx="7772400" cy="3200400"/>
+            <a:off x="566928" y="1335024"/>
+            <a:ext cx="566928" cy="20117"/>
+          </a:xfrm>
+          <a:prstGeom prst="rect">
+            <a:avLst/>
+          </a:prstGeom>
+          <a:solidFill>
+            <a:srgbClr val="9A6A3C"/>
+          </a:solidFill>
+          <a:ln/>
+        </p:spPr>
+      </p:sp>
+      <p:sp>
+        <p:nvSpPr>
+          <p:cNvPr id="5" name="Text 3"/>
+          <p:cNvSpPr/>
+          <p:nvPr/>
+        </p:nvSpPr>
+        <p:spPr>
+          <a:xfrm>
+            <a:off x="713232" y="1664208"/>
+            <a:ext cx="7498080" cy="2788920"/>
           </a:xfrm>
           <a:prstGeom prst="rect">
             <a:avLst/>
@@ -3358,19 +3490,22 @@
           <a:p>
             <a:pPr marL="342900" indent="-342900">
               <a:lnSpc>
-                <a:spcPct val="125000"/>
+                <a:spcPct val="130000"/>
               </a:lnSpc>
               <a:spcAft>
-                <a:spcPts val="800"/>
+                <a:spcPts val="1100"/>
               </a:spcAft>
               <a:buSzPct val="100000"/>
-              <a:buChar char="•"/>
+              <a:buChar char="–"/>
             </a:pPr>
             <a:r>
               <a:rPr lang="en-US" sz="1500" dirty="0">
                 <a:solidFill>
-                  <a:srgbClr val="374151"/>
-                </a:solidFill>
+                  <a:srgbClr val="23282E"/>
+                </a:solidFill>
+                <a:latin typeface="Corbel" pitchFamily="34" charset="0"/>
+                <a:ea typeface="Corbel" pitchFamily="34" charset="-122"/>
+                <a:cs typeface="Corbel" pitchFamily="34" charset="-120"/>
               </a:rPr>
               <a:t>A data management plan states what data are collected, how stored, who has access, how backed up, how long retained and what is shared</a:t>
             </a:r>
@@ -3379,19 +3514,22 @@
           <a:p>
             <a:pPr marL="342900" indent="-342900">
               <a:lnSpc>
-                <a:spcPct val="125000"/>
+                <a:spcPct val="130000"/>
               </a:lnSpc>
               <a:spcAft>
-                <a:spcPts val="800"/>
+                <a:spcPts val="1100"/>
               </a:spcAft>
               <a:buSzPct val="100000"/>
-              <a:buChar char="•"/>
+              <a:buChar char="–"/>
             </a:pPr>
             <a:r>
               <a:rPr lang="en-US" sz="1500" dirty="0">
                 <a:solidFill>
-                  <a:srgbClr val="374151"/>
-                </a:solidFill>
+                  <a:srgbClr val="23282E"/>
+                </a:solidFill>
+                <a:latin typeface="Corbel" pitchFamily="34" charset="0"/>
+                <a:ea typeface="Corbel" pitchFamily="34" charset="-122"/>
+                <a:cs typeface="Corbel" pitchFamily="34" charset="-120"/>
               </a:rPr>
               <a:t>Follow the 3-2-1 rule: three copies, two media, one off-site</a:t>
             </a:r>
@@ -3400,19 +3538,22 @@
           <a:p>
             <a:pPr marL="342900" indent="-342900">
               <a:lnSpc>
-                <a:spcPct val="125000"/>
+                <a:spcPct val="130000"/>
               </a:lnSpc>
               <a:spcAft>
-                <a:spcPts val="800"/>
+                <a:spcPts val="1100"/>
               </a:spcAft>
               <a:buSzPct val="100000"/>
-              <a:buChar char="•"/>
+              <a:buChar char="–"/>
             </a:pPr>
             <a:r>
               <a:rPr lang="en-US" sz="1500" dirty="0">
                 <a:solidFill>
-                  <a:srgbClr val="374151"/>
-                </a:solidFill>
+                  <a:srgbClr val="23282E"/>
+                </a:solidFill>
+                <a:latin typeface="Corbel" pitchFamily="34" charset="0"/>
+                <a:ea typeface="Corbel" pitchFamily="34" charset="-122"/>
+                <a:cs typeface="Corbel" pitchFamily="34" charset="-120"/>
               </a:rPr>
               <a:t>Version your files by date and never overwrite raw data — all cleaning happens in a script or a documented copy</a:t>
             </a:r>
@@ -3421,19 +3562,22 @@
           <a:p>
             <a:pPr marL="342900" indent="-342900">
               <a:lnSpc>
-                <a:spcPct val="125000"/>
+                <a:spcPct val="130000"/>
               </a:lnSpc>
               <a:spcAft>
-                <a:spcPts val="800"/>
+                <a:spcPts val="1100"/>
               </a:spcAft>
               <a:buSzPct val="100000"/>
-              <a:buChar char="•"/>
+              <a:buChar char="–"/>
             </a:pPr>
             <a:r>
               <a:rPr lang="en-US" sz="1500" dirty="0">
                 <a:solidFill>
-                  <a:srgbClr val="374151"/>
-                </a:solidFill>
+                  <a:srgbClr val="23282E"/>
+                </a:solidFill>
+                <a:latin typeface="Corbel" pitchFamily="34" charset="0"/>
+                <a:ea typeface="Corbel" pitchFamily="34" charset="-122"/>
+                <a:cs typeface="Corbel" pitchFamily="34" charset="-120"/>
               </a:rPr>
               <a:t>FAIR principles — Findable, Accessible, Interoperable, Reusable — increasingly required by funders</a:t>
             </a:r>
@@ -3453,8 +3597,8 @@
         </p:nvSpPr>
         <p:spPr>
           <a:xfrm>
-            <a:off x="8503920" y="4709160"/>
-            <a:ext cx="800000" cy="300000"/>
+            <a:off x="566928" y="4700016"/>
+            <a:ext cx="914400" cy="274320"/>
           </a:xfrm>
           <a:prstGeom prst="rect">
             <a:avLst/>
@@ -3469,10 +3613,13 @@
           <a:bodyPr/>
           <a:lstStyle>
             <a:lvl1pPr>
-              <a:defRPr sz="1000">
-                <a:solidFill>
-                  <a:srgbClr val="6B7280"/>
-                </a:solidFill>
+              <a:defRPr sz="900">
+                <a:solidFill>
+                  <a:srgbClr val="5F6B76"/>
+                </a:solidFill>
+                <a:latin typeface="Corbel"/>
+                <a:ea typeface="Corbel"/>
+                <a:cs typeface="Corbel"/>
               </a:defRPr>
             </a:lvl1pPr>
           </a:lstStyle>
@@ -3519,8 +3666,8 @@
         </p:nvSpPr>
         <p:spPr>
           <a:xfrm>
-            <a:off x="502920" y="292608"/>
-            <a:ext cx="8046720" cy="228600"/>
+            <a:off x="566928" y="384048"/>
+            <a:ext cx="7772400" cy="237744"/>
           </a:xfrm>
           <a:prstGeom prst="rect">
             <a:avLst/>
@@ -3536,14 +3683,17 @@
               <a:buNone/>
             </a:pPr>
             <a:r>
-              <a:rPr lang="en-US" sz="1100" b="1" spc="150" kern="0" dirty="0">
-                <a:solidFill>
-                  <a:srgbClr val="0066CC"/>
-                </a:solidFill>
+              <a:rPr lang="en-US" sz="1000" spc="200" kern="0" dirty="0">
+                <a:solidFill>
+                  <a:srgbClr val="9A6A3C"/>
+                </a:solidFill>
+                <a:latin typeface="Corbel" pitchFamily="34" charset="0"/>
+                <a:ea typeface="Corbel" pitchFamily="34" charset="-122"/>
+                <a:cs typeface="Corbel" pitchFamily="34" charset="-120"/>
               </a:rPr>
               <a:t>UNIT 10</a:t>
             </a:r>
-            <a:endParaRPr lang="en-US" sz="1100" dirty="0"/>
+            <a:endParaRPr lang="en-US" sz="1000" dirty="0"/>
           </a:p>
         </p:txBody>
       </p:sp>
@@ -3555,8 +3705,8 @@
         </p:nvSpPr>
         <p:spPr>
           <a:xfrm>
-            <a:off x="502920" y="548640"/>
-            <a:ext cx="8046720" cy="640080"/>
+            <a:off x="566928" y="658368"/>
+            <a:ext cx="7772400" cy="658368"/>
           </a:xfrm>
           <a:prstGeom prst="rect">
             <a:avLst/>
@@ -3569,30 +3719,56 @@
           <a:lstStyle/>
           <a:p>
             <a:pPr indent="0" marL="0">
+              <a:lnSpc>
+                <a:spcPct val="100000"/>
+              </a:lnSpc>
               <a:buNone/>
             </a:pPr>
             <a:r>
-              <a:rPr lang="en-US" sz="2400" b="1" dirty="0">
-                <a:solidFill>
-                  <a:srgbClr val="111827"/>
-                </a:solidFill>
+              <a:rPr lang="en-US" sz="2500" dirty="0">
+                <a:solidFill>
+                  <a:srgbClr val="1C3140"/>
+                </a:solidFill>
+                <a:latin typeface="Constantia" pitchFamily="34" charset="0"/>
+                <a:ea typeface="Constantia" pitchFamily="34" charset="-122"/>
+                <a:cs typeface="Constantia" pitchFamily="34" charset="-120"/>
               </a:rPr>
               <a:t>Data management and dissemination (2/2)</a:t>
             </a:r>
-            <a:endParaRPr lang="en-US" sz="2400" dirty="0"/>
-          </a:p>
-        </p:txBody>
-      </p:sp>
-      <p:sp>
-        <p:nvSpPr>
-          <p:cNvPr id="4" name="Text 2"/>
+            <a:endParaRPr lang="en-US" sz="2500" dirty="0"/>
+          </a:p>
+        </p:txBody>
+      </p:sp>
+      <p:sp>
+        <p:nvSpPr>
+          <p:cNvPr id="4" name="Shape 2"/>
           <p:cNvSpPr/>
           <p:nvPr/>
         </p:nvSpPr>
         <p:spPr>
           <a:xfrm>
-            <a:off x="685800" y="1325880"/>
-            <a:ext cx="7772400" cy="3200400"/>
+            <a:off x="566928" y="1335024"/>
+            <a:ext cx="566928" cy="20117"/>
+          </a:xfrm>
+          <a:prstGeom prst="rect">
+            <a:avLst/>
+          </a:prstGeom>
+          <a:solidFill>
+            <a:srgbClr val="9A6A3C"/>
+          </a:solidFill>
+          <a:ln/>
+        </p:spPr>
+      </p:sp>
+      <p:sp>
+        <p:nvSpPr>
+          <p:cNvPr id="5" name="Text 3"/>
+          <p:cNvSpPr/>
+          <p:nvPr/>
+        </p:nvSpPr>
+        <p:spPr>
+          <a:xfrm>
+            <a:off x="713232" y="1664208"/>
+            <a:ext cx="7498080" cy="2788920"/>
           </a:xfrm>
           <a:prstGeom prst="rect">
             <a:avLst/>
@@ -3606,65 +3782,74 @@
           <a:p>
             <a:pPr marL="342900" indent="-342900">
               <a:lnSpc>
-                <a:spcPct val="125000"/>
+                <a:spcPct val="130000"/>
               </a:lnSpc>
               <a:spcAft>
-                <a:spcPts val="800"/>
+                <a:spcPts val="1100"/>
               </a:spcAft>
               <a:buSzPct val="100000"/>
-              <a:buChar char="•"/>
-            </a:pPr>
-            <a:r>
-              <a:rPr lang="en-US" sz="1300" dirty="0">
-                <a:solidFill>
-                  <a:srgbClr val="374151"/>
-                </a:solidFill>
+              <a:buChar char="–"/>
+            </a:pPr>
+            <a:r>
+              <a:rPr lang="en-US" sz="1350" dirty="0">
+                <a:solidFill>
+                  <a:srgbClr val="23282E"/>
+                </a:solidFill>
+                <a:latin typeface="Corbel" pitchFamily="34" charset="0"/>
+                <a:ea typeface="Corbel" pitchFamily="34" charset="-122"/>
+                <a:cs typeface="Corbel" pitchFamily="34" charset="-120"/>
               </a:rPr>
               <a:t>Dissemination should reach participants and their communities, not only journals: policy briefs, community feedback meetings, radio, professional bodies</a:t>
             </a:r>
-            <a:endParaRPr lang="en-US" sz="1300" dirty="0"/>
+            <a:endParaRPr lang="en-US" sz="1350" dirty="0"/>
           </a:p>
           <a:p>
             <a:pPr marL="342900" indent="-342900">
               <a:lnSpc>
-                <a:spcPct val="125000"/>
+                <a:spcPct val="130000"/>
               </a:lnSpc>
               <a:spcAft>
-                <a:spcPts val="800"/>
+                <a:spcPts val="1100"/>
               </a:spcAft>
               <a:buSzPct val="100000"/>
-              <a:buChar char="•"/>
-            </a:pPr>
-            <a:r>
-              <a:rPr lang="en-US" sz="1300" dirty="0">
-                <a:solidFill>
-                  <a:srgbClr val="374151"/>
-                </a:solidFill>
+              <a:buChar char="–"/>
+            </a:pPr>
+            <a:r>
+              <a:rPr lang="en-US" sz="1350" dirty="0">
+                <a:solidFill>
+                  <a:srgbClr val="23282E"/>
+                </a:solidFill>
+                <a:latin typeface="Corbel" pitchFamily="34" charset="0"/>
+                <a:ea typeface="Corbel" pitchFamily="34" charset="-122"/>
+                <a:cs typeface="Corbel" pitchFamily="34" charset="-120"/>
               </a:rPr>
               <a:t>Feeding results back to the community that provided them is an ethical obligation, and it is what makes the next study possible</a:t>
             </a:r>
-            <a:endParaRPr lang="en-US" sz="1300" dirty="0"/>
+            <a:endParaRPr lang="en-US" sz="1350" dirty="0"/>
           </a:p>
           <a:p>
             <a:pPr marL="342900" indent="-342900">
               <a:lnSpc>
-                <a:spcPct val="125000"/>
+                <a:spcPct val="130000"/>
               </a:lnSpc>
               <a:spcAft>
-                <a:spcPts val="800"/>
+                <a:spcPts val="1100"/>
               </a:spcAft>
               <a:buSzPct val="100000"/>
-              <a:buChar char="•"/>
-            </a:pPr>
-            <a:r>
-              <a:rPr lang="en-US" sz="1300" dirty="0">
-                <a:solidFill>
-                  <a:srgbClr val="374151"/>
-                </a:solidFill>
+              <a:buChar char="–"/>
+            </a:pPr>
+            <a:r>
+              <a:rPr lang="en-US" sz="1350" dirty="0">
+                <a:solidFill>
+                  <a:srgbClr val="23282E"/>
+                </a:solidFill>
+                <a:latin typeface="Corbel" pitchFamily="34" charset="0"/>
+                <a:ea typeface="Corbel" pitchFamily="34" charset="-122"/>
+                <a:cs typeface="Corbel" pitchFamily="34" charset="-120"/>
               </a:rPr>
               <a:t>Plan dissemination in the proposal, and budget for it</a:t>
             </a:r>
-            <a:endParaRPr lang="en-US" sz="1300" dirty="0"/>
+            <a:endParaRPr lang="en-US" sz="1350" dirty="0"/>
           </a:p>
         </p:txBody>
       </p:sp>
@@ -3680,8 +3865,8 @@
         </p:nvSpPr>
         <p:spPr>
           <a:xfrm>
-            <a:off x="8503920" y="4709160"/>
-            <a:ext cx="800000" cy="300000"/>
+            <a:off x="566928" y="4700016"/>
+            <a:ext cx="914400" cy="274320"/>
           </a:xfrm>
           <a:prstGeom prst="rect">
             <a:avLst/>
@@ -3696,10 +3881,13 @@
           <a:bodyPr/>
           <a:lstStyle>
             <a:lvl1pPr>
-              <a:defRPr sz="1000">
-                <a:solidFill>
-                  <a:srgbClr val="6B7280"/>
-                </a:solidFill>
+              <a:defRPr sz="900">
+                <a:solidFill>
+                  <a:srgbClr val="5F6B76"/>
+                </a:solidFill>
+                <a:latin typeface="Corbel"/>
+                <a:ea typeface="Corbel"/>
+                <a:cs typeface="Corbel"/>
               </a:defRPr>
             </a:lvl1pPr>
           </a:lstStyle>
@@ -3746,8 +3934,8 @@
         </p:nvSpPr>
         <p:spPr>
           <a:xfrm>
-            <a:off x="502920" y="292608"/>
-            <a:ext cx="8046720" cy="228600"/>
+            <a:off x="566928" y="384048"/>
+            <a:ext cx="7772400" cy="237744"/>
           </a:xfrm>
           <a:prstGeom prst="rect">
             <a:avLst/>
@@ -3763,14 +3951,17 @@
               <a:buNone/>
             </a:pPr>
             <a:r>
-              <a:rPr lang="en-US" sz="1100" b="1" spc="150" kern="0" dirty="0">
-                <a:solidFill>
-                  <a:srgbClr val="00A86B"/>
-                </a:solidFill>
+              <a:rPr lang="en-US" sz="1000" spc="200" kern="0" dirty="0">
+                <a:solidFill>
+                  <a:srgbClr val="9A6A3C"/>
+                </a:solidFill>
+                <a:latin typeface="Corbel" pitchFamily="34" charset="0"/>
+                <a:ea typeface="Corbel" pitchFamily="34" charset="-122"/>
+                <a:cs typeface="Corbel" pitchFamily="34" charset="-120"/>
               </a:rPr>
               <a:t>UNIT 10  ·  WORKED EXAMPLE</a:t>
             </a:r>
-            <a:endParaRPr lang="en-US" sz="1100" dirty="0"/>
+            <a:endParaRPr lang="en-US" sz="1000" dirty="0"/>
           </a:p>
         </p:txBody>
       </p:sp>
@@ -3782,8 +3973,8 @@
         </p:nvSpPr>
         <p:spPr>
           <a:xfrm>
-            <a:off x="502920" y="548640"/>
-            <a:ext cx="8046720" cy="566928"/>
+            <a:off x="566928" y="658368"/>
+            <a:ext cx="7772400" cy="658368"/>
           </a:xfrm>
           <a:prstGeom prst="rect">
             <a:avLst/>
@@ -3796,17 +3987,23 @@
           <a:lstStyle/>
           <a:p>
             <a:pPr indent="0" marL="0">
+              <a:lnSpc>
+                <a:spcPct val="100000"/>
+              </a:lnSpc>
               <a:buNone/>
             </a:pPr>
             <a:r>
-              <a:rPr lang="en-US" sz="2300" b="1" dirty="0">
-                <a:solidFill>
-                  <a:srgbClr val="111827"/>
-                </a:solidFill>
+              <a:rPr lang="en-US" sz="2500" dirty="0">
+                <a:solidFill>
+                  <a:srgbClr val="1C3140"/>
+                </a:solidFill>
+                <a:latin typeface="Constantia" pitchFamily="34" charset="0"/>
+                <a:ea typeface="Constantia" pitchFamily="34" charset="-122"/>
+                <a:cs typeface="Constantia" pitchFamily="34" charset="-120"/>
               </a:rPr>
               <a:t>A limitations section that earns marks instead of losing them</a:t>
             </a:r>
-            <a:endParaRPr lang="en-US" sz="2300" dirty="0"/>
+            <a:endParaRPr lang="en-US" sz="2500" dirty="0"/>
           </a:p>
         </p:txBody>
       </p:sp>
@@ -3818,21 +4015,16 @@
         </p:nvSpPr>
         <p:spPr>
           <a:xfrm>
-            <a:off x="502920" y="1207008"/>
-            <a:ext cx="8138160" cy="3200400"/>
+            <a:off x="566928" y="1335024"/>
+            <a:ext cx="566928" cy="20117"/>
           </a:xfrm>
           <a:prstGeom prst="rect">
             <a:avLst/>
           </a:prstGeom>
           <a:solidFill>
-            <a:srgbClr val="F3F7FC"/>
+            <a:srgbClr val="9A6A3C"/>
           </a:solidFill>
-          <a:ln w="9525">
-            <a:solidFill>
-              <a:srgbClr val="0066CC"/>
-            </a:solidFill>
-            <a:prstDash val="solid"/>
-          </a:ln>
+          <a:ln/>
         </p:spPr>
       </p:sp>
       <p:sp>
@@ -3843,8 +4035,8 @@
         </p:nvSpPr>
         <p:spPr>
           <a:xfrm>
-            <a:off x="731520" y="1371600"/>
-            <a:ext cx="7680960" cy="1005840"/>
+            <a:off x="566928" y="1645920"/>
+            <a:ext cx="8010144" cy="822960"/>
           </a:xfrm>
           <a:prstGeom prst="rect">
             <a:avLst/>
@@ -3858,19 +4050,22 @@
           <a:p>
             <a:pPr indent="0" marL="0">
               <a:lnSpc>
-                <a:spcPct val="120000"/>
+                <a:spcPct val="124000"/>
               </a:lnSpc>
               <a:buNone/>
             </a:pPr>
             <a:r>
-              <a:rPr lang="en-US" sz="1400" i="1" dirty="0">
-                <a:solidFill>
-                  <a:srgbClr val="374151"/>
-                </a:solidFill>
+              <a:rPr lang="en-US" sz="1300" i="1" dirty="0">
+                <a:solidFill>
+                  <a:srgbClr val="5F6B76"/>
+                </a:solidFill>
+                <a:latin typeface="Constantia" pitchFamily="34" charset="0"/>
+                <a:ea typeface="Constantia" pitchFamily="34" charset="-122"/>
+                <a:cs typeface="Constantia" pitchFamily="34" charset="-120"/>
               </a:rPr>
               <a:t>A student writes: "Limitations included time and financial constraints, and a small sample size. More research is needed."</a:t>
             </a:r>
-            <a:endParaRPr lang="en-US" sz="1400" dirty="0"/>
+            <a:endParaRPr lang="en-US" sz="1300" dirty="0"/>
           </a:p>
         </p:txBody>
       </p:sp>
@@ -3882,8 +4077,8 @@
         </p:nvSpPr>
         <p:spPr>
           <a:xfrm>
-            <a:off x="868680" y="2395728"/>
-            <a:ext cx="7452360" cy="1920240"/>
+            <a:off x="786384" y="2523744"/>
+            <a:ext cx="7406640" cy="1920240"/>
           </a:xfrm>
           <a:prstGeom prst="rect">
             <a:avLst/>
@@ -3897,116 +4092,152 @@
           <a:p>
             <a:pPr marL="342900" indent="-342900">
               <a:lnSpc>
-                <a:spcPct val="115000"/>
-              </a:lnSpc>
+                <a:spcPct val="120000"/>
+              </a:lnSpc>
+              <a:spcAft>
+                <a:spcPts val="500"/>
+              </a:spcAft>
               <a:buSzPct val="100000"/>
               <a:buFont typeface="+mj-lt"/>
               <a:buAutoNum type="arabicPeriod" startAt="1"/>
             </a:pPr>
             <a:r>
-              <a:rPr lang="en-US" sz="1300" dirty="0">
-                <a:solidFill>
-                  <a:srgbClr val="374151"/>
-                </a:solidFill>
+              <a:rPr lang="en-US" sz="1250" dirty="0">
+                <a:solidFill>
+                  <a:srgbClr val="23282E"/>
+                </a:solidFill>
+                <a:latin typeface="Corbel" pitchFamily="34" charset="0"/>
+                <a:ea typeface="Corbel" pitchFamily="34" charset="-122"/>
+                <a:cs typeface="Corbel" pitchFamily="34" charset="-120"/>
               </a:rPr>
               <a:t>Time and money are constraints on the researcher, not limitations of the evidence — they tell the reader nothing.</a:t>
             </a:r>
-            <a:endParaRPr lang="en-US" sz="1300" dirty="0"/>
+            <a:endParaRPr lang="en-US" sz="1250" dirty="0"/>
           </a:p>
           <a:p>
             <a:pPr marL="342900" indent="-342900">
               <a:lnSpc>
-                <a:spcPct val="115000"/>
-              </a:lnSpc>
+                <a:spcPct val="120000"/>
+              </a:lnSpc>
+              <a:spcAft>
+                <a:spcPts val="500"/>
+              </a:spcAft>
               <a:buSzPct val="100000"/>
               <a:buFont typeface="+mj-lt"/>
               <a:buAutoNum type="arabicPeriod" startAt="1"/>
             </a:pPr>
             <a:r>
-              <a:rPr lang="en-US" sz="1300" dirty="0">
-                <a:solidFill>
-                  <a:srgbClr val="374151"/>
-                </a:solidFill>
+              <a:rPr lang="en-US" sz="1250" dirty="0">
+                <a:solidFill>
+                  <a:srgbClr val="23282E"/>
+                </a:solidFill>
+                <a:latin typeface="Corbel" pitchFamily="34" charset="0"/>
+                <a:ea typeface="Corbel" pitchFamily="34" charset="-122"/>
+                <a:cs typeface="Corbel" pitchFamily="34" charset="-120"/>
               </a:rPr>
               <a:t>"Small sample" is unquantified: small relative to what, and with what consequence?</a:t>
             </a:r>
-            <a:endParaRPr lang="en-US" sz="1300" dirty="0"/>
+            <a:endParaRPr lang="en-US" sz="1250" dirty="0"/>
           </a:p>
           <a:p>
             <a:pPr marL="342900" indent="-342900">
               <a:lnSpc>
-                <a:spcPct val="115000"/>
-              </a:lnSpc>
+                <a:spcPct val="120000"/>
+              </a:lnSpc>
+              <a:spcAft>
+                <a:spcPts val="500"/>
+              </a:spcAft>
               <a:buSzPct val="100000"/>
               <a:buFont typeface="+mj-lt"/>
               <a:buAutoNum type="arabicPeriod" startAt="1"/>
             </a:pPr>
             <a:r>
-              <a:rPr lang="en-US" sz="1300" dirty="0">
-                <a:solidFill>
-                  <a:srgbClr val="374151"/>
-                </a:solidFill>
+              <a:rPr lang="en-US" sz="1250" dirty="0">
+                <a:solidFill>
+                  <a:srgbClr val="23282E"/>
+                </a:solidFill>
+                <a:latin typeface="Corbel" pitchFamily="34" charset="0"/>
+                <a:ea typeface="Corbel" pitchFamily="34" charset="-122"/>
+                <a:cs typeface="Corbel" pitchFamily="34" charset="-120"/>
               </a:rPr>
               <a:t>Name the specific threat: the sample came from one urban clinic.</a:t>
             </a:r>
-            <a:endParaRPr lang="en-US" sz="1300" dirty="0"/>
+            <a:endParaRPr lang="en-US" sz="1250" dirty="0"/>
           </a:p>
           <a:p>
             <a:pPr marL="342900" indent="-342900">
               <a:lnSpc>
-                <a:spcPct val="115000"/>
-              </a:lnSpc>
+                <a:spcPct val="120000"/>
+              </a:lnSpc>
+              <a:spcAft>
+                <a:spcPts val="500"/>
+              </a:spcAft>
               <a:buSzPct val="100000"/>
               <a:buFont typeface="+mj-lt"/>
               <a:buAutoNum type="arabicPeriod" startAt="1"/>
             </a:pPr>
             <a:r>
-              <a:rPr lang="en-US" sz="1300" dirty="0">
-                <a:solidFill>
-                  <a:srgbClr val="374151"/>
-                </a:solidFill>
+              <a:rPr lang="en-US" sz="1250" dirty="0">
+                <a:solidFill>
+                  <a:srgbClr val="23282E"/>
+                </a:solidFill>
+                <a:latin typeface="Corbel" pitchFamily="34" charset="0"/>
+                <a:ea typeface="Corbel" pitchFamily="34" charset="-122"/>
+                <a:cs typeface="Corbel" pitchFamily="34" charset="-120"/>
               </a:rPr>
               <a:t>State the likely direction: urban patients are more literate and closer to care, so adherence is probably overestimated.</a:t>
             </a:r>
-            <a:endParaRPr lang="en-US" sz="1300" dirty="0"/>
+            <a:endParaRPr lang="en-US" sz="1250" dirty="0"/>
           </a:p>
           <a:p>
             <a:pPr marL="342900" indent="-342900">
               <a:lnSpc>
-                <a:spcPct val="115000"/>
-              </a:lnSpc>
+                <a:spcPct val="120000"/>
+              </a:lnSpc>
+              <a:spcAft>
+                <a:spcPts val="500"/>
+              </a:spcAft>
               <a:buSzPct val="100000"/>
               <a:buFont typeface="+mj-lt"/>
               <a:buAutoNum type="arabicPeriod" startAt="1"/>
             </a:pPr>
             <a:r>
-              <a:rPr lang="en-US" sz="1300" dirty="0">
-                <a:solidFill>
-                  <a:srgbClr val="374151"/>
-                </a:solidFill>
+              <a:rPr lang="en-US" sz="1250" dirty="0">
+                <a:solidFill>
+                  <a:srgbClr val="23282E"/>
+                </a:solidFill>
+                <a:latin typeface="Corbel" pitchFamily="34" charset="0"/>
+                <a:ea typeface="Corbel" pitchFamily="34" charset="-122"/>
+                <a:cs typeface="Corbel" pitchFamily="34" charset="-120"/>
               </a:rPr>
               <a:t>State the mitigation: findings are presented as applying to urban facility attenders, not to the district population.</a:t>
             </a:r>
-            <a:endParaRPr lang="en-US" sz="1300" dirty="0"/>
+            <a:endParaRPr lang="en-US" sz="1250" dirty="0"/>
           </a:p>
           <a:p>
             <a:pPr marL="342900" indent="-342900">
               <a:lnSpc>
-                <a:spcPct val="115000"/>
-              </a:lnSpc>
+                <a:spcPct val="120000"/>
+              </a:lnSpc>
+              <a:spcAft>
+                <a:spcPts val="500"/>
+              </a:spcAft>
               <a:buSzPct val="100000"/>
               <a:buFont typeface="+mj-lt"/>
               <a:buAutoNum type="arabicPeriod" startAt="1"/>
             </a:pPr>
             <a:r>
-              <a:rPr lang="en-US" sz="1300" dirty="0">
-                <a:solidFill>
-                  <a:srgbClr val="374151"/>
-                </a:solidFill>
+              <a:rPr lang="en-US" sz="1250" dirty="0">
+                <a:solidFill>
+                  <a:srgbClr val="23282E"/>
+                </a:solidFill>
+                <a:latin typeface="Corbel" pitchFamily="34" charset="0"/>
+                <a:ea typeface="Corbel" pitchFamily="34" charset="-122"/>
+                <a:cs typeface="Corbel" pitchFamily="34" charset="-120"/>
               </a:rPr>
               <a:t>Rewritten: "Recruitment from a single urban clinic likely over-represents literate, higher-income patients and probably overstates adherence; results should be read as applying to urban facility attenders."</a:t>
             </a:r>
-            <a:endParaRPr lang="en-US" sz="1300" dirty="0"/>
+            <a:endParaRPr lang="en-US" sz="1250" dirty="0"/>
           </a:p>
         </p:txBody>
       </p:sp>
@@ -4022,8 +4253,8 @@
         </p:nvSpPr>
         <p:spPr>
           <a:xfrm>
-            <a:off x="8503920" y="4709160"/>
-            <a:ext cx="800000" cy="300000"/>
+            <a:off x="566928" y="4700016"/>
+            <a:ext cx="914400" cy="274320"/>
           </a:xfrm>
           <a:prstGeom prst="rect">
             <a:avLst/>
@@ -4038,10 +4269,13 @@
           <a:bodyPr/>
           <a:lstStyle>
             <a:lvl1pPr>
-              <a:defRPr sz="1000">
-                <a:solidFill>
-                  <a:srgbClr val="6B7280"/>
-                </a:solidFill>
+              <a:defRPr sz="900">
+                <a:solidFill>
+                  <a:srgbClr val="5F6B76"/>
+                </a:solidFill>
+                <a:latin typeface="Corbel"/>
+                <a:ea typeface="Corbel"/>
+                <a:cs typeface="Corbel"/>
               </a:defRPr>
             </a:lvl1pPr>
           </a:lstStyle>
@@ -4088,8 +4322,8 @@
         </p:nvSpPr>
         <p:spPr>
           <a:xfrm>
-            <a:off x="502920" y="292608"/>
-            <a:ext cx="8046720" cy="228600"/>
+            <a:off x="566928" y="384048"/>
+            <a:ext cx="7772400" cy="237744"/>
           </a:xfrm>
           <a:prstGeom prst="rect">
             <a:avLst/>
@@ -4105,14 +4339,17 @@
               <a:buNone/>
             </a:pPr>
             <a:r>
-              <a:rPr lang="en-US" sz="1100" b="1" spc="150" kern="0" dirty="0">
-                <a:solidFill>
-                  <a:srgbClr val="00A86B"/>
-                </a:solidFill>
+              <a:rPr lang="en-US" sz="1000" spc="200" kern="0" dirty="0">
+                <a:solidFill>
+                  <a:srgbClr val="9A6A3C"/>
+                </a:solidFill>
+                <a:latin typeface="Corbel" pitchFamily="34" charset="0"/>
+                <a:ea typeface="Corbel" pitchFamily="34" charset="-122"/>
+                <a:cs typeface="Corbel" pitchFamily="34" charset="-120"/>
               </a:rPr>
               <a:t>UNIT 10  ·  WORKED EXAMPLE</a:t>
             </a:r>
-            <a:endParaRPr lang="en-US" sz="1100" dirty="0"/>
+            <a:endParaRPr lang="en-US" sz="1000" dirty="0"/>
           </a:p>
         </p:txBody>
       </p:sp>
@@ -4124,8 +4361,8 @@
         </p:nvSpPr>
         <p:spPr>
           <a:xfrm>
-            <a:off x="502920" y="548640"/>
-            <a:ext cx="8046720" cy="566928"/>
+            <a:off x="566928" y="658368"/>
+            <a:ext cx="7772400" cy="658368"/>
           </a:xfrm>
           <a:prstGeom prst="rect">
             <a:avLst/>
@@ -4138,17 +4375,23 @@
           <a:lstStyle/>
           <a:p>
             <a:pPr indent="0" marL="0">
+              <a:lnSpc>
+                <a:spcPct val="100000"/>
+              </a:lnSpc>
               <a:buNone/>
             </a:pPr>
             <a:r>
-              <a:rPr lang="en-US" sz="2300" b="1" dirty="0">
-                <a:solidFill>
-                  <a:srgbClr val="111827"/>
-                </a:solidFill>
+              <a:rPr lang="en-US" sz="2500" dirty="0">
+                <a:solidFill>
+                  <a:srgbClr val="1C3140"/>
+                </a:solidFill>
+                <a:latin typeface="Constantia" pitchFamily="34" charset="0"/>
+                <a:ea typeface="Constantia" pitchFamily="34" charset="-122"/>
+                <a:cs typeface="Constantia" pitchFamily="34" charset="-120"/>
               </a:rPr>
               <a:t>Building the timeline backwards from the deadline</a:t>
             </a:r>
-            <a:endParaRPr lang="en-US" sz="2300" dirty="0"/>
+            <a:endParaRPr lang="en-US" sz="2500" dirty="0"/>
           </a:p>
         </p:txBody>
       </p:sp>
@@ -4160,21 +4403,16 @@
         </p:nvSpPr>
         <p:spPr>
           <a:xfrm>
-            <a:off x="502920" y="1207008"/>
-            <a:ext cx="8138160" cy="3200400"/>
+            <a:off x="566928" y="1335024"/>
+            <a:ext cx="566928" cy="20117"/>
           </a:xfrm>
           <a:prstGeom prst="rect">
             <a:avLst/>
           </a:prstGeom>
           <a:solidFill>
-            <a:srgbClr val="F3F7FC"/>
+            <a:srgbClr val="9A6A3C"/>
           </a:solidFill>
-          <a:ln w="9525">
-            <a:solidFill>
-              <a:srgbClr val="0066CC"/>
-            </a:solidFill>
-            <a:prstDash val="solid"/>
-          </a:ln>
+          <a:ln/>
         </p:spPr>
       </p:sp>
       <p:sp>
@@ -4185,8 +4423,8 @@
         </p:nvSpPr>
         <p:spPr>
           <a:xfrm>
-            <a:off x="731520" y="1371600"/>
-            <a:ext cx="7680960" cy="1005840"/>
+            <a:off x="566928" y="1645920"/>
+            <a:ext cx="8010144" cy="822960"/>
           </a:xfrm>
           <a:prstGeom prst="rect">
             <a:avLst/>
@@ -4200,19 +4438,22 @@
           <a:p>
             <a:pPr indent="0" marL="0">
               <a:lnSpc>
-                <a:spcPct val="120000"/>
+                <a:spcPct val="124000"/>
               </a:lnSpc>
               <a:buNone/>
             </a:pPr>
             <a:r>
-              <a:rPr lang="en-US" sz="1400" i="1" dirty="0">
-                <a:solidFill>
-                  <a:srgbClr val="374151"/>
-                </a:solidFill>
+              <a:rPr lang="en-US" sz="1300" i="1" dirty="0">
+                <a:solidFill>
+                  <a:srgbClr val="5F6B76"/>
+                </a:solidFill>
+                <a:latin typeface="Constantia" pitchFamily="34" charset="0"/>
+                <a:ea typeface="Constantia" pitchFamily="34" charset="-122"/>
+                <a:cs typeface="Constantia" pitchFamily="34" charset="-120"/>
               </a:rPr>
               <a:t>A student has 12 months and plans: "Months 1-2 proposal, 3-8 data collection, 9-10 analysis, 11-12 writing." It is already unrealistic.</a:t>
             </a:r>
-            <a:endParaRPr lang="en-US" sz="1400" dirty="0"/>
+            <a:endParaRPr lang="en-US" sz="1300" dirty="0"/>
           </a:p>
         </p:txBody>
       </p:sp>
@@ -4224,8 +4465,8 @@
         </p:nvSpPr>
         <p:spPr>
           <a:xfrm>
-            <a:off x="868680" y="2395728"/>
-            <a:ext cx="7452360" cy="1920240"/>
+            <a:off x="786384" y="2523744"/>
+            <a:ext cx="7406640" cy="1920240"/>
           </a:xfrm>
           <a:prstGeom prst="rect">
             <a:avLst/>
@@ -4239,116 +4480,152 @@
           <a:p>
             <a:pPr marL="342900" indent="-342900">
               <a:lnSpc>
-                <a:spcPct val="115000"/>
-              </a:lnSpc>
+                <a:spcPct val="120000"/>
+              </a:lnSpc>
+              <a:spcAft>
+                <a:spcPts val="500"/>
+              </a:spcAft>
               <a:buSzPct val="100000"/>
               <a:buFont typeface="+mj-lt"/>
               <a:buAutoNum type="arabicPeriod" startAt="1"/>
             </a:pPr>
             <a:r>
-              <a:rPr lang="en-US" sz="1300" dirty="0">
-                <a:solidFill>
-                  <a:srgbClr val="374151"/>
-                </a:solidFill>
+              <a:rPr lang="en-US" sz="1250" dirty="0">
+                <a:solidFill>
+                  <a:srgbClr val="23282E"/>
+                </a:solidFill>
+                <a:latin typeface="Corbel" pitchFamily="34" charset="0"/>
+                <a:ea typeface="Corbel" pitchFamily="34" charset="-122"/>
+                <a:cs typeface="Corbel" pitchFamily="34" charset="-120"/>
               </a:rPr>
               <a:t>Ethical approval commonly takes 1-3 months and cannot start until the proposal is finished — so fieldwork cannot begin in month 3.</a:t>
             </a:r>
-            <a:endParaRPr lang="en-US" sz="1300" dirty="0"/>
+            <a:endParaRPr lang="en-US" sz="1250" dirty="0"/>
           </a:p>
           <a:p>
             <a:pPr marL="342900" indent="-342900">
               <a:lnSpc>
-                <a:spcPct val="115000"/>
-              </a:lnSpc>
+                <a:spcPct val="120000"/>
+              </a:lnSpc>
+              <a:spcAft>
+                <a:spcPts val="500"/>
+              </a:spcAft>
               <a:buSzPct val="100000"/>
               <a:buFont typeface="+mj-lt"/>
               <a:buAutoNum type="arabicPeriod" startAt="1"/>
             </a:pPr>
             <a:r>
-              <a:rPr lang="en-US" sz="1300" dirty="0">
-                <a:solidFill>
-                  <a:srgbClr val="374151"/>
-                </a:solidFill>
+              <a:rPr lang="en-US" sz="1250" dirty="0">
+                <a:solidFill>
+                  <a:srgbClr val="23282E"/>
+                </a:solidFill>
+                <a:latin typeface="Corbel" pitchFamily="34" charset="0"/>
+                <a:ea typeface="Corbel" pitchFamily="34" charset="-122"/>
+                <a:cs typeface="Corbel" pitchFamily="34" charset="-120"/>
               </a:rPr>
               <a:t>For 20 interviews at 1 hour each, transcription alone is 80-120 hours of work, which is weeks not days.</a:t>
             </a:r>
-            <a:endParaRPr lang="en-US" sz="1300" dirty="0"/>
+            <a:endParaRPr lang="en-US" sz="1250" dirty="0"/>
           </a:p>
           <a:p>
             <a:pPr marL="342900" indent="-342900">
               <a:lnSpc>
-                <a:spcPct val="115000"/>
-              </a:lnSpc>
+                <a:spcPct val="120000"/>
+              </a:lnSpc>
+              <a:spcAft>
+                <a:spcPts val="500"/>
+              </a:spcAft>
               <a:buSzPct val="100000"/>
               <a:buFont typeface="+mj-lt"/>
               <a:buAutoNum type="arabicPeriod" startAt="1"/>
             </a:pPr>
             <a:r>
-              <a:rPr lang="en-US" sz="1300" dirty="0">
-                <a:solidFill>
-                  <a:srgbClr val="374151"/>
-                </a:solidFill>
+              <a:rPr lang="en-US" sz="1250" dirty="0">
+                <a:solidFill>
+                  <a:srgbClr val="23282E"/>
+                </a:solidFill>
+                <a:latin typeface="Corbel" pitchFamily="34" charset="0"/>
+                <a:ea typeface="Corbel" pitchFamily="34" charset="-122"/>
+                <a:cs typeface="Corbel" pitchFamily="34" charset="-120"/>
               </a:rPr>
               <a:t>Analysis cannot begin until cleaning is done, and cleaning always takes longer than planned.</a:t>
             </a:r>
-            <a:endParaRPr lang="en-US" sz="1300" dirty="0"/>
+            <a:endParaRPr lang="en-US" sz="1250" dirty="0"/>
           </a:p>
           <a:p>
             <a:pPr marL="342900" indent="-342900">
               <a:lnSpc>
-                <a:spcPct val="115000"/>
-              </a:lnSpc>
+                <a:spcPct val="120000"/>
+              </a:lnSpc>
+              <a:spcAft>
+                <a:spcPts val="500"/>
+              </a:spcAft>
               <a:buSzPct val="100000"/>
               <a:buFont typeface="+mj-lt"/>
               <a:buAutoNum type="arabicPeriod" startAt="1"/>
             </a:pPr>
             <a:r>
-              <a:rPr lang="en-US" sz="1300" dirty="0">
-                <a:solidFill>
-                  <a:srgbClr val="374151"/>
-                </a:solidFill>
+              <a:rPr lang="en-US" sz="1250" dirty="0">
+                <a:solidFill>
+                  <a:srgbClr val="23282E"/>
+                </a:solidFill>
+                <a:latin typeface="Corbel" pitchFamily="34" charset="0"/>
+                <a:ea typeface="Corbel" pitchFamily="34" charset="-122"/>
+                <a:cs typeface="Corbel" pitchFamily="34" charset="-120"/>
               </a:rPr>
               <a:t>Supervisors need time to read: allow two weeks per full draft, and expect at least three drafts.</a:t>
             </a:r>
-            <a:endParaRPr lang="en-US" sz="1300" dirty="0"/>
+            <a:endParaRPr lang="en-US" sz="1250" dirty="0"/>
           </a:p>
           <a:p>
             <a:pPr marL="342900" indent="-342900">
               <a:lnSpc>
-                <a:spcPct val="115000"/>
-              </a:lnSpc>
+                <a:spcPct val="120000"/>
+              </a:lnSpc>
+              <a:spcAft>
+                <a:spcPts val="500"/>
+              </a:spcAft>
               <a:buSzPct val="100000"/>
               <a:buFont typeface="+mj-lt"/>
               <a:buAutoNum type="arabicPeriod" startAt="1"/>
             </a:pPr>
             <a:r>
-              <a:rPr lang="en-US" sz="1300" dirty="0">
-                <a:solidFill>
-                  <a:srgbClr val="374151"/>
-                </a:solidFill>
+              <a:rPr lang="en-US" sz="1250" dirty="0">
+                <a:solidFill>
+                  <a:srgbClr val="23282E"/>
+                </a:solidFill>
+                <a:latin typeface="Corbel" pitchFamily="34" charset="0"/>
+                <a:ea typeface="Corbel" pitchFamily="34" charset="-122"/>
+                <a:cs typeface="Corbel" pitchFamily="34" charset="-120"/>
               </a:rPr>
               <a:t>Working backwards from submission: writing 3 months, analysis 2, transcription 1, fieldwork 3, approval 2, proposal 1 — that is 12 with no contingency.</a:t>
             </a:r>
-            <a:endParaRPr lang="en-US" sz="1300" dirty="0"/>
+            <a:endParaRPr lang="en-US" sz="1250" dirty="0"/>
           </a:p>
           <a:p>
             <a:pPr marL="342900" indent="-342900">
               <a:lnSpc>
-                <a:spcPct val="115000"/>
-              </a:lnSpc>
+                <a:spcPct val="120000"/>
+              </a:lnSpc>
+              <a:spcAft>
+                <a:spcPts val="500"/>
+              </a:spcAft>
               <a:buSzPct val="100000"/>
               <a:buFont typeface="+mj-lt"/>
               <a:buAutoNum type="arabicPeriod" startAt="1"/>
             </a:pPr>
             <a:r>
-              <a:rPr lang="en-US" sz="1300" dirty="0">
-                <a:solidFill>
-                  <a:srgbClr val="374151"/>
-                </a:solidFill>
+              <a:rPr lang="en-US" sz="1250" dirty="0">
+                <a:solidFill>
+                  <a:srgbClr val="23282E"/>
+                </a:solidFill>
+                <a:latin typeface="Corbel" pitchFamily="34" charset="0"/>
+                <a:ea typeface="Corbel" pitchFamily="34" charset="-122"/>
+                <a:cs typeface="Corbel" pitchFamily="34" charset="-120"/>
               </a:rPr>
               <a:t>So either reduce scope now, or accept the plan will slip.</a:t>
             </a:r>
-            <a:endParaRPr lang="en-US" sz="1300" dirty="0"/>
+            <a:endParaRPr lang="en-US" sz="1250" dirty="0"/>
           </a:p>
         </p:txBody>
       </p:sp>
@@ -4364,8 +4641,8 @@
         </p:nvSpPr>
         <p:spPr>
           <a:xfrm>
-            <a:off x="8503920" y="4709160"/>
-            <a:ext cx="800000" cy="300000"/>
+            <a:off x="566928" y="4700016"/>
+            <a:ext cx="914400" cy="274320"/>
           </a:xfrm>
           <a:prstGeom prst="rect">
             <a:avLst/>
@@ -4380,10 +4657,13 @@
           <a:bodyPr/>
           <a:lstStyle>
             <a:lvl1pPr>
-              <a:defRPr sz="1000">
-                <a:solidFill>
-                  <a:srgbClr val="6B7280"/>
-                </a:solidFill>
+              <a:defRPr sz="900">
+                <a:solidFill>
+                  <a:srgbClr val="5F6B76"/>
+                </a:solidFill>
+                <a:latin typeface="Corbel"/>
+                <a:ea typeface="Corbel"/>
+                <a:cs typeface="Corbel"/>
               </a:defRPr>
             </a:lvl1pPr>
           </a:lstStyle>
@@ -4430,8 +4710,8 @@
         </p:nvSpPr>
         <p:spPr>
           <a:xfrm>
-            <a:off x="502920" y="292608"/>
-            <a:ext cx="8046720" cy="228600"/>
+            <a:off x="566928" y="384048"/>
+            <a:ext cx="7772400" cy="237744"/>
           </a:xfrm>
           <a:prstGeom prst="rect">
             <a:avLst/>
@@ -4447,14 +4727,17 @@
               <a:buNone/>
             </a:pPr>
             <a:r>
-              <a:rPr lang="en-US" sz="1100" b="1" spc="150" kern="0" dirty="0">
-                <a:solidFill>
-                  <a:srgbClr val="0066CC"/>
-                </a:solidFill>
+              <a:rPr lang="en-US" sz="1000" spc="200" kern="0" dirty="0">
+                <a:solidFill>
+                  <a:srgbClr val="9A6A3C"/>
+                </a:solidFill>
+                <a:latin typeface="Corbel" pitchFamily="34" charset="0"/>
+                <a:ea typeface="Corbel" pitchFamily="34" charset="-122"/>
+                <a:cs typeface="Corbel" pitchFamily="34" charset="-120"/>
               </a:rPr>
               <a:t>UNIT 10</a:t>
             </a:r>
-            <a:endParaRPr lang="en-US" sz="1100" dirty="0"/>
+            <a:endParaRPr lang="en-US" sz="1000" dirty="0"/>
           </a:p>
         </p:txBody>
       </p:sp>
@@ -4466,8 +4749,8 @@
         </p:nvSpPr>
         <p:spPr>
           <a:xfrm>
-            <a:off x="502920" y="548640"/>
-            <a:ext cx="8046720" cy="640080"/>
+            <a:off x="566928" y="658368"/>
+            <a:ext cx="7772400" cy="658368"/>
           </a:xfrm>
           <a:prstGeom prst="rect">
             <a:avLst/>
@@ -4480,30 +4763,56 @@
           <a:lstStyle/>
           <a:p>
             <a:pPr indent="0" marL="0">
+              <a:lnSpc>
+                <a:spcPct val="100000"/>
+              </a:lnSpc>
               <a:buNone/>
             </a:pPr>
             <a:r>
-              <a:rPr lang="en-US" sz="2400" b="1" dirty="0">
-                <a:solidFill>
-                  <a:srgbClr val="111827"/>
-                </a:solidFill>
+              <a:rPr lang="en-US" sz="2500" dirty="0">
+                <a:solidFill>
+                  <a:srgbClr val="1C3140"/>
+                </a:solidFill>
+                <a:latin typeface="Constantia" pitchFamily="34" charset="0"/>
+                <a:ea typeface="Constantia" pitchFamily="34" charset="-122"/>
+                <a:cs typeface="Constantia" pitchFamily="34" charset="-120"/>
               </a:rPr>
               <a:t>Key terms (1/2)</a:t>
             </a:r>
-            <a:endParaRPr lang="en-US" sz="2400" dirty="0"/>
-          </a:p>
-        </p:txBody>
-      </p:sp>
-      <p:sp>
-        <p:nvSpPr>
-          <p:cNvPr id="4" name="Text 2"/>
+            <a:endParaRPr lang="en-US" sz="2500" dirty="0"/>
+          </a:p>
+        </p:txBody>
+      </p:sp>
+      <p:sp>
+        <p:nvSpPr>
+          <p:cNvPr id="4" name="Shape 2"/>
           <p:cNvSpPr/>
           <p:nvPr/>
         </p:nvSpPr>
         <p:spPr>
           <a:xfrm>
-            <a:off x="685800" y="1325880"/>
-            <a:ext cx="7772400" cy="3200400"/>
+            <a:off x="566928" y="1335024"/>
+            <a:ext cx="566928" cy="20117"/>
+          </a:xfrm>
+          <a:prstGeom prst="rect">
+            <a:avLst/>
+          </a:prstGeom>
+          <a:solidFill>
+            <a:srgbClr val="9A6A3C"/>
+          </a:solidFill>
+          <a:ln/>
+        </p:spPr>
+      </p:sp>
+      <p:sp>
+        <p:nvSpPr>
+          <p:cNvPr id="5" name="Text 3"/>
+          <p:cNvSpPr/>
+          <p:nvPr/>
+        </p:nvSpPr>
+        <p:spPr>
+          <a:xfrm>
+            <a:off x="713232" y="1664208"/>
+            <a:ext cx="7498080" cy="2788920"/>
           </a:xfrm>
           <a:prstGeom prst="rect">
             <a:avLst/>
@@ -4517,19 +4826,22 @@
           <a:p>
             <a:pPr marL="342900" indent="-342900">
               <a:lnSpc>
-                <a:spcPct val="125000"/>
+                <a:spcPct val="130000"/>
               </a:lnSpc>
               <a:spcAft>
-                <a:spcPts val="800"/>
+                <a:spcPts val="1100"/>
               </a:spcAft>
               <a:buSzPct val="100000"/>
-              <a:buChar char="•"/>
+              <a:buChar char="–"/>
             </a:pPr>
             <a:r>
               <a:rPr lang="en-US" sz="1500" dirty="0">
                 <a:solidFill>
-                  <a:srgbClr val="374151"/>
-                </a:solidFill>
+                  <a:srgbClr val="23282E"/>
+                </a:solidFill>
+                <a:latin typeface="Corbel" pitchFamily="34" charset="0"/>
+                <a:ea typeface="Corbel" pitchFamily="34" charset="-122"/>
+                <a:cs typeface="Corbel" pitchFamily="34" charset="-120"/>
               </a:rPr>
               <a:t>Gantt chart — A bar chart showing project activities against time, making dependencies and overlaps visible.</a:t>
             </a:r>
@@ -4538,19 +4850,22 @@
           <a:p>
             <a:pPr marL="342900" indent="-342900">
               <a:lnSpc>
-                <a:spcPct val="125000"/>
+                <a:spcPct val="130000"/>
               </a:lnSpc>
               <a:spcAft>
-                <a:spcPts val="800"/>
+                <a:spcPts val="1100"/>
               </a:spcAft>
               <a:buSzPct val="100000"/>
-              <a:buChar char="•"/>
+              <a:buChar char="–"/>
             </a:pPr>
             <a:r>
               <a:rPr lang="en-US" sz="1500" dirty="0">
                 <a:solidFill>
-                  <a:srgbClr val="374151"/>
-                </a:solidFill>
+                  <a:srgbClr val="23282E"/>
+                </a:solidFill>
+                <a:latin typeface="Corbel" pitchFamily="34" charset="0"/>
+                <a:ea typeface="Corbel" pitchFamily="34" charset="-122"/>
+                <a:cs typeface="Corbel" pitchFamily="34" charset="-120"/>
               </a:rPr>
               <a:t>STROBE — The reporting checklist for observational epidemiological studies.</a:t>
             </a:r>
@@ -4559,19 +4874,22 @@
           <a:p>
             <a:pPr marL="342900" indent="-342900">
               <a:lnSpc>
-                <a:spcPct val="125000"/>
+                <a:spcPct val="130000"/>
               </a:lnSpc>
               <a:spcAft>
-                <a:spcPts val="800"/>
+                <a:spcPts val="1100"/>
               </a:spcAft>
               <a:buSzPct val="100000"/>
-              <a:buChar char="•"/>
+              <a:buChar char="–"/>
             </a:pPr>
             <a:r>
               <a:rPr lang="en-US" sz="1500" dirty="0">
                 <a:solidFill>
-                  <a:srgbClr val="374151"/>
-                </a:solidFill>
+                  <a:srgbClr val="23282E"/>
+                </a:solidFill>
+                <a:latin typeface="Corbel" pitchFamily="34" charset="0"/>
+                <a:ea typeface="Corbel" pitchFamily="34" charset="-122"/>
+                <a:cs typeface="Corbel" pitchFamily="34" charset="-120"/>
               </a:rPr>
               <a:t>COREQ — The 32-item reporting checklist for qualitative interview and focus group research.</a:t>
             </a:r>
@@ -4580,19 +4898,22 @@
           <a:p>
             <a:pPr marL="342900" indent="-342900">
               <a:lnSpc>
-                <a:spcPct val="125000"/>
+                <a:spcPct val="130000"/>
               </a:lnSpc>
               <a:spcAft>
-                <a:spcPts val="800"/>
+                <a:spcPts val="1100"/>
               </a:spcAft>
               <a:buSzPct val="100000"/>
-              <a:buChar char="•"/>
+              <a:buChar char="–"/>
             </a:pPr>
             <a:r>
               <a:rPr lang="en-US" sz="1500" dirty="0">
                 <a:solidFill>
-                  <a:srgbClr val="374151"/>
-                </a:solidFill>
+                  <a:srgbClr val="23282E"/>
+                </a:solidFill>
+                <a:latin typeface="Corbel" pitchFamily="34" charset="0"/>
+                <a:ea typeface="Corbel" pitchFamily="34" charset="-122"/>
+                <a:cs typeface="Corbel" pitchFamily="34" charset="-120"/>
               </a:rPr>
               <a:t>Data management plan — A document specifying how data will be collected, stored, protected, retained and shared.</a:t>
             </a:r>
@@ -4612,8 +4933,8 @@
         </p:nvSpPr>
         <p:spPr>
           <a:xfrm>
-            <a:off x="8503920" y="4709160"/>
-            <a:ext cx="800000" cy="300000"/>
+            <a:off x="566928" y="4700016"/>
+            <a:ext cx="914400" cy="274320"/>
           </a:xfrm>
           <a:prstGeom prst="rect">
             <a:avLst/>
@@ -4628,10 +4949,13 @@
           <a:bodyPr/>
           <a:lstStyle>
             <a:lvl1pPr>
-              <a:defRPr sz="1000">
-                <a:solidFill>
-                  <a:srgbClr val="6B7280"/>
-                </a:solidFill>
+              <a:defRPr sz="900">
+                <a:solidFill>
+                  <a:srgbClr val="5F6B76"/>
+                </a:solidFill>
+                <a:latin typeface="Corbel"/>
+                <a:ea typeface="Corbel"/>
+                <a:cs typeface="Corbel"/>
               </a:defRPr>
             </a:lvl1pPr>
           </a:lstStyle>
@@ -4678,8 +5002,8 @@
         </p:nvSpPr>
         <p:spPr>
           <a:xfrm>
-            <a:off x="502920" y="292608"/>
-            <a:ext cx="8046720" cy="228600"/>
+            <a:off x="566928" y="384048"/>
+            <a:ext cx="7772400" cy="237744"/>
           </a:xfrm>
           <a:prstGeom prst="rect">
             <a:avLst/>
@@ -4695,14 +5019,17 @@
               <a:buNone/>
             </a:pPr>
             <a:r>
-              <a:rPr lang="en-US" sz="1100" b="1" spc="150" kern="0" dirty="0">
-                <a:solidFill>
-                  <a:srgbClr val="0066CC"/>
-                </a:solidFill>
+              <a:rPr lang="en-US" sz="1000" spc="200" kern="0" dirty="0">
+                <a:solidFill>
+                  <a:srgbClr val="9A6A3C"/>
+                </a:solidFill>
+                <a:latin typeface="Corbel" pitchFamily="34" charset="0"/>
+                <a:ea typeface="Corbel" pitchFamily="34" charset="-122"/>
+                <a:cs typeface="Corbel" pitchFamily="34" charset="-120"/>
               </a:rPr>
               <a:t>UNIT 10</a:t>
             </a:r>
-            <a:endParaRPr lang="en-US" sz="1100" dirty="0"/>
+            <a:endParaRPr lang="en-US" sz="1000" dirty="0"/>
           </a:p>
         </p:txBody>
       </p:sp>
@@ -4714,8 +5041,8 @@
         </p:nvSpPr>
         <p:spPr>
           <a:xfrm>
-            <a:off x="502920" y="548640"/>
-            <a:ext cx="8046720" cy="640080"/>
+            <a:off x="566928" y="658368"/>
+            <a:ext cx="7772400" cy="658368"/>
           </a:xfrm>
           <a:prstGeom prst="rect">
             <a:avLst/>
@@ -4728,30 +5055,56 @@
           <a:lstStyle/>
           <a:p>
             <a:pPr indent="0" marL="0">
+              <a:lnSpc>
+                <a:spcPct val="100000"/>
+              </a:lnSpc>
               <a:buNone/>
             </a:pPr>
             <a:r>
-              <a:rPr lang="en-US" sz="2400" b="1" dirty="0">
-                <a:solidFill>
-                  <a:srgbClr val="111827"/>
-                </a:solidFill>
+              <a:rPr lang="en-US" sz="2500" dirty="0">
+                <a:solidFill>
+                  <a:srgbClr val="1C3140"/>
+                </a:solidFill>
+                <a:latin typeface="Constantia" pitchFamily="34" charset="0"/>
+                <a:ea typeface="Constantia" pitchFamily="34" charset="-122"/>
+                <a:cs typeface="Constantia" pitchFamily="34" charset="-120"/>
               </a:rPr>
               <a:t>Key terms (2/2)</a:t>
             </a:r>
-            <a:endParaRPr lang="en-US" sz="2400" dirty="0"/>
-          </a:p>
-        </p:txBody>
-      </p:sp>
-      <p:sp>
-        <p:nvSpPr>
-          <p:cNvPr id="4" name="Text 2"/>
+            <a:endParaRPr lang="en-US" sz="2500" dirty="0"/>
+          </a:p>
+        </p:txBody>
+      </p:sp>
+      <p:sp>
+        <p:nvSpPr>
+          <p:cNvPr id="4" name="Shape 2"/>
           <p:cNvSpPr/>
           <p:nvPr/>
         </p:nvSpPr>
         <p:spPr>
           <a:xfrm>
-            <a:off x="685800" y="1325880"/>
-            <a:ext cx="7772400" cy="3200400"/>
+            <a:off x="566928" y="1335024"/>
+            <a:ext cx="566928" cy="20117"/>
+          </a:xfrm>
+          <a:prstGeom prst="rect">
+            <a:avLst/>
+          </a:prstGeom>
+          <a:solidFill>
+            <a:srgbClr val="9A6A3C"/>
+          </a:solidFill>
+          <a:ln/>
+        </p:spPr>
+      </p:sp>
+      <p:sp>
+        <p:nvSpPr>
+          <p:cNvPr id="5" name="Text 3"/>
+          <p:cNvSpPr/>
+          <p:nvPr/>
+        </p:nvSpPr>
+        <p:spPr>
+          <a:xfrm>
+            <a:off x="713232" y="1664208"/>
+            <a:ext cx="7498080" cy="2788920"/>
           </a:xfrm>
           <a:prstGeom prst="rect">
             <a:avLst/>
@@ -4765,65 +5118,74 @@
           <a:p>
             <a:pPr marL="342900" indent="-342900">
               <a:lnSpc>
-                <a:spcPct val="125000"/>
+                <a:spcPct val="130000"/>
               </a:lnSpc>
               <a:spcAft>
-                <a:spcPts val="800"/>
+                <a:spcPts val="1100"/>
               </a:spcAft>
               <a:buSzPct val="100000"/>
-              <a:buChar char="•"/>
-            </a:pPr>
-            <a:r>
-              <a:rPr lang="en-US" sz="1700" dirty="0">
-                <a:solidFill>
-                  <a:srgbClr val="374151"/>
-                </a:solidFill>
+              <a:buChar char="–"/>
+            </a:pPr>
+            <a:r>
+              <a:rPr lang="en-US" sz="1650" dirty="0">
+                <a:solidFill>
+                  <a:srgbClr val="23282E"/>
+                </a:solidFill>
+                <a:latin typeface="Corbel" pitchFamily="34" charset="0"/>
+                <a:ea typeface="Corbel" pitchFamily="34" charset="-122"/>
+                <a:cs typeface="Corbel" pitchFamily="34" charset="-120"/>
               </a:rPr>
               <a:t>FAIR principles — Findable, Accessible, Interoperable, Reusable — standards for research data stewardship.</a:t>
             </a:r>
-            <a:endParaRPr lang="en-US" sz="1700" dirty="0"/>
+            <a:endParaRPr lang="en-US" sz="1650" dirty="0"/>
           </a:p>
           <a:p>
             <a:pPr marL="342900" indent="-342900">
               <a:lnSpc>
-                <a:spcPct val="125000"/>
+                <a:spcPct val="130000"/>
               </a:lnSpc>
               <a:spcAft>
-                <a:spcPts val="800"/>
+                <a:spcPts val="1100"/>
               </a:spcAft>
               <a:buSzPct val="100000"/>
-              <a:buChar char="•"/>
-            </a:pPr>
-            <a:r>
-              <a:rPr lang="en-US" sz="1700" dirty="0">
-                <a:solidFill>
-                  <a:srgbClr val="374151"/>
-                </a:solidFill>
+              <a:buChar char="–"/>
+            </a:pPr>
+            <a:r>
+              <a:rPr lang="en-US" sz="1650" dirty="0">
+                <a:solidFill>
+                  <a:srgbClr val="23282E"/>
+                </a:solidFill>
+                <a:latin typeface="Corbel" pitchFamily="34" charset="0"/>
+                <a:ea typeface="Corbel" pitchFamily="34" charset="-122"/>
+                <a:cs typeface="Corbel" pitchFamily="34" charset="-120"/>
               </a:rPr>
               <a:t>p-hacking — Trying analyses until a significant result appears, then reporting only that one.</a:t>
             </a:r>
-            <a:endParaRPr lang="en-US" sz="1700" dirty="0"/>
+            <a:endParaRPr lang="en-US" sz="1650" dirty="0"/>
           </a:p>
           <a:p>
             <a:pPr marL="342900" indent="-342900">
               <a:lnSpc>
-                <a:spcPct val="125000"/>
+                <a:spcPct val="130000"/>
               </a:lnSpc>
               <a:spcAft>
-                <a:spcPts val="800"/>
+                <a:spcPts val="1100"/>
               </a:spcAft>
               <a:buSzPct val="100000"/>
-              <a:buChar char="•"/>
-            </a:pPr>
-            <a:r>
-              <a:rPr lang="en-US" sz="1700" dirty="0">
-                <a:solidFill>
-                  <a:srgbClr val="374151"/>
-                </a:solidFill>
+              <a:buChar char="–"/>
+            </a:pPr>
+            <a:r>
+              <a:rPr lang="en-US" sz="1650" dirty="0">
+                <a:solidFill>
+                  <a:srgbClr val="23282E"/>
+                </a:solidFill>
+                <a:latin typeface="Corbel" pitchFamily="34" charset="0"/>
+                <a:ea typeface="Corbel" pitchFamily="34" charset="-122"/>
+                <a:cs typeface="Corbel" pitchFamily="34" charset="-120"/>
               </a:rPr>
               <a:t>Policy brief — A short, non-technical summary of findings and recommendations aimed at decision makers.</a:t>
             </a:r>
-            <a:endParaRPr lang="en-US" sz="1700" dirty="0"/>
+            <a:endParaRPr lang="en-US" sz="1650" dirty="0"/>
           </a:p>
         </p:txBody>
       </p:sp>
@@ -4839,8 +5201,8 @@
         </p:nvSpPr>
         <p:spPr>
           <a:xfrm>
-            <a:off x="8503920" y="4709160"/>
-            <a:ext cx="800000" cy="300000"/>
+            <a:off x="566928" y="4700016"/>
+            <a:ext cx="914400" cy="274320"/>
           </a:xfrm>
           <a:prstGeom prst="rect">
             <a:avLst/>
@@ -4855,10 +5217,13 @@
           <a:bodyPr/>
           <a:lstStyle>
             <a:lvl1pPr>
-              <a:defRPr sz="1000">
-                <a:solidFill>
-                  <a:srgbClr val="6B7280"/>
-                </a:solidFill>
+              <a:defRPr sz="900">
+                <a:solidFill>
+                  <a:srgbClr val="5F6B76"/>
+                </a:solidFill>
+                <a:latin typeface="Corbel"/>
+                <a:ea typeface="Corbel"/>
+                <a:cs typeface="Corbel"/>
               </a:defRPr>
             </a:lvl1pPr>
           </a:lstStyle>
@@ -4905,8 +5270,8 @@
         </p:nvSpPr>
         <p:spPr>
           <a:xfrm>
-            <a:off x="502920" y="292608"/>
-            <a:ext cx="8046720" cy="228600"/>
+            <a:off x="685800" y="1024128"/>
+            <a:ext cx="6766560" cy="292608"/>
           </a:xfrm>
           <a:prstGeom prst="rect">
             <a:avLst/>
@@ -4922,14 +5287,17 @@
               <a:buNone/>
             </a:pPr>
             <a:r>
-              <a:rPr lang="en-US" sz="1100" b="1" spc="150" kern="0" dirty="0">
-                <a:solidFill>
-                  <a:srgbClr val="0066CC"/>
-                </a:solidFill>
-              </a:rPr>
-              <a:t>UNIT 10  ·  OVER TO YOU</a:t>
-            </a:r>
-            <a:endParaRPr lang="en-US" sz="1100" dirty="0"/>
+              <a:rPr lang="en-US" sz="1150" spc="240" kern="0" dirty="0">
+                <a:solidFill>
+                  <a:srgbClr val="C8A67B"/>
+                </a:solidFill>
+                <a:latin typeface="Corbel" pitchFamily="34" charset="0"/>
+                <a:ea typeface="Corbel" pitchFamily="34" charset="-122"/>
+                <a:cs typeface="Corbel" pitchFamily="34" charset="-120"/>
+              </a:rPr>
+              <a:t>Over to you</a:t>
+            </a:r>
+            <a:endParaRPr lang="en-US" sz="1150" dirty="0"/>
           </a:p>
         </p:txBody>
       </p:sp>
@@ -4941,8 +5309,8 @@
         </p:nvSpPr>
         <p:spPr>
           <a:xfrm>
-            <a:off x="502920" y="548640"/>
-            <a:ext cx="8046720" cy="640080"/>
+            <a:off x="685800" y="1700784"/>
+            <a:ext cx="6858000" cy="640080"/>
           </a:xfrm>
           <a:prstGeom prst="rect">
             <a:avLst/>
@@ -4958,14 +5326,17 @@
               <a:buNone/>
             </a:pPr>
             <a:r>
-              <a:rPr lang="en-US" sz="2400" b="1" dirty="0">
-                <a:solidFill>
-                  <a:srgbClr val="111827"/>
-                </a:solidFill>
+              <a:rPr lang="en-US" sz="3000" dirty="0">
+                <a:solidFill>
+                  <a:srgbClr val="FFFFFF"/>
+                </a:solidFill>
+                <a:latin typeface="Constantia" pitchFamily="34" charset="0"/>
+                <a:ea typeface="Constantia" pitchFamily="34" charset="-122"/>
+                <a:cs typeface="Constantia" pitchFamily="34" charset="-120"/>
               </a:rPr>
               <a:t>Activity</a:t>
             </a:r>
-            <a:endParaRPr lang="en-US" sz="2400" dirty="0"/>
+            <a:endParaRPr lang="en-US" sz="3000" dirty="0"/>
           </a:p>
         </p:txBody>
       </p:sp>
@@ -4977,8 +5348,8 @@
         </p:nvSpPr>
         <p:spPr>
           <a:xfrm>
-            <a:off x="685800" y="1325880"/>
-            <a:ext cx="7772400" cy="3200400"/>
+            <a:off x="685800" y="2487168"/>
+            <a:ext cx="6949440" cy="1737360"/>
           </a:xfrm>
           <a:prstGeom prst="rect">
             <a:avLst/>
@@ -4990,70 +5361,24 @@
           <a:bodyPr wrap="square" rtlCol="0" anchor="t"/>
           <a:lstStyle/>
           <a:p>
-            <a:pPr marL="342900" indent="-342900">
-              <a:lnSpc>
-                <a:spcPct val="125000"/>
-              </a:lnSpc>
-              <a:spcAft>
-                <a:spcPts val="800"/>
-              </a:spcAft>
-              <a:buSzPct val="100000"/>
-              <a:buChar char="•"/>
-            </a:pPr>
-            <a:r>
-              <a:rPr lang="en-US" sz="1300" dirty="0">
-                <a:solidFill>
-                  <a:srgbClr val="374151"/>
-                </a:solidFill>
+            <a:pPr indent="0" marL="0">
+              <a:lnSpc>
+                <a:spcPct val="134000"/>
+              </a:lnSpc>
+              <a:buNone/>
+            </a:pPr>
+            <a:r>
+              <a:rPr lang="en-US" sz="1450" dirty="0">
+                <a:solidFill>
+                  <a:srgbClr val="C4CCD4"/>
+                </a:solidFill>
+                <a:latin typeface="Corbel" pitchFamily="34" charset="0"/>
+                <a:ea typeface="Corbel" pitchFamily="34" charset="-122"/>
+                <a:cs typeface="Corbel" pitchFamily="34" charset="-120"/>
               </a:rPr>
               <a:t>Assemble a two-page proposal skeleton for your own study: title, aim, three objectives, design, sampling and sample size, analysis plan, and three limitations each stating direction and mitigation. Exchange with a partner and mark it against the relevant reporting checklist.</a:t>
             </a:r>
-            <a:endParaRPr lang="en-US" sz="1300" dirty="0"/>
-          </a:p>
-        </p:txBody>
-      </p:sp>
-      <p:sp>
-        <p:nvSpPr>
-          <p:cNvPr id="25" name="Slide Number Placeholder 0"/>
-          <p:cNvSpPr>
-            <a:spLocks noGrp="1"/>
-          </p:cNvSpPr>
-          <p:nvPr>
-            <p:ph type="sldNum" sz="quarter" idx="4294967295"/>
-          </p:nvPr>
-        </p:nvSpPr>
-        <p:spPr>
-          <a:xfrm>
-            <a:off x="8503920" y="4709160"/>
-            <a:ext cx="800000" cy="300000"/>
-          </a:xfrm>
-          <a:prstGeom prst="rect">
-            <a:avLst/>
-          </a:prstGeom>
-          <a:extLst>
-            <a:ext uri="{C572A759-6A51-4108-AA02-DFA0A04FC94B}">
-              <ma14:wrappingTextBoxFlag xmlns:ma14="http://schemas.microsoft.com/office/mac/drawingml/2011/main" val="0"/>
-            </a:ext>
-          </a:extLst>
-        </p:spPr>
-        <p:txBody>
-          <a:bodyPr/>
-          <a:lstStyle>
-            <a:lvl1pPr>
-              <a:defRPr sz="1000">
-                <a:solidFill>
-                  <a:srgbClr val="6B7280"/>
-                </a:solidFill>
-              </a:defRPr>
-            </a:lvl1pPr>
-          </a:lstStyle>
-          <a:p>
-            <a:pPr algn="l"/>
-            <a:fld id="{F7021451-1387-4CA6-816F-3879F97B5CBC}" type="slidenum">
-              <a:rPr b="0" lang="en-US"/>
-              <a:t>18</a:t>
-            </a:fld>
-            <a:endParaRPr lang="en-US"/>
+            <a:endParaRPr lang="en-US" sz="1450" dirty="0"/>
           </a:p>
         </p:txBody>
       </p:sp>
@@ -5090,8 +5415,8 @@
         </p:nvSpPr>
         <p:spPr>
           <a:xfrm>
-            <a:off x="502920" y="292608"/>
-            <a:ext cx="8046720" cy="228600"/>
+            <a:off x="566928" y="384048"/>
+            <a:ext cx="7772400" cy="237744"/>
           </a:xfrm>
           <a:prstGeom prst="rect">
             <a:avLst/>
@@ -5107,14 +5432,17 @@
               <a:buNone/>
             </a:pPr>
             <a:r>
-              <a:rPr lang="en-US" sz="1100" b="1" spc="150" kern="0" dirty="0">
-                <a:solidFill>
-                  <a:srgbClr val="0066CC"/>
-                </a:solidFill>
+              <a:rPr lang="en-US" sz="1000" spc="200" kern="0" dirty="0">
+                <a:solidFill>
+                  <a:srgbClr val="9A6A3C"/>
+                </a:solidFill>
+                <a:latin typeface="Corbel" pitchFamily="34" charset="0"/>
+                <a:ea typeface="Corbel" pitchFamily="34" charset="-122"/>
+                <a:cs typeface="Corbel" pitchFamily="34" charset="-120"/>
               </a:rPr>
               <a:t>UNIT 10</a:t>
             </a:r>
-            <a:endParaRPr lang="en-US" sz="1100" dirty="0"/>
+            <a:endParaRPr lang="en-US" sz="1000" dirty="0"/>
           </a:p>
         </p:txBody>
       </p:sp>
@@ -5126,8 +5454,8 @@
         </p:nvSpPr>
         <p:spPr>
           <a:xfrm>
-            <a:off x="502920" y="548640"/>
-            <a:ext cx="8046720" cy="640080"/>
+            <a:off x="566928" y="658368"/>
+            <a:ext cx="7772400" cy="658368"/>
           </a:xfrm>
           <a:prstGeom prst="rect">
             <a:avLst/>
@@ -5140,30 +5468,56 @@
           <a:lstStyle/>
           <a:p>
             <a:pPr indent="0" marL="0">
+              <a:lnSpc>
+                <a:spcPct val="100000"/>
+              </a:lnSpc>
               <a:buNone/>
             </a:pPr>
             <a:r>
-              <a:rPr lang="en-US" sz="2400" b="1" dirty="0">
-                <a:solidFill>
-                  <a:srgbClr val="111827"/>
-                </a:solidFill>
+              <a:rPr lang="en-US" sz="2500" dirty="0">
+                <a:solidFill>
+                  <a:srgbClr val="1C3140"/>
+                </a:solidFill>
+                <a:latin typeface="Constantia" pitchFamily="34" charset="0"/>
+                <a:ea typeface="Constantia" pitchFamily="34" charset="-122"/>
+                <a:cs typeface="Constantia" pitchFamily="34" charset="-120"/>
               </a:rPr>
               <a:t>What you will be able to do</a:t>
             </a:r>
-            <a:endParaRPr lang="en-US" sz="2400" dirty="0"/>
-          </a:p>
-        </p:txBody>
-      </p:sp>
-      <p:sp>
-        <p:nvSpPr>
-          <p:cNvPr id="4" name="Text 2"/>
+            <a:endParaRPr lang="en-US" sz="2500" dirty="0"/>
+          </a:p>
+        </p:txBody>
+      </p:sp>
+      <p:sp>
+        <p:nvSpPr>
+          <p:cNvPr id="4" name="Shape 2"/>
           <p:cNvSpPr/>
           <p:nvPr/>
         </p:nvSpPr>
         <p:spPr>
           <a:xfrm>
-            <a:off x="685800" y="1325880"/>
-            <a:ext cx="7772400" cy="3200400"/>
+            <a:off x="566928" y="1335024"/>
+            <a:ext cx="566928" cy="20117"/>
+          </a:xfrm>
+          <a:prstGeom prst="rect">
+            <a:avLst/>
+          </a:prstGeom>
+          <a:solidFill>
+            <a:srgbClr val="9A6A3C"/>
+          </a:solidFill>
+          <a:ln/>
+        </p:spPr>
+      </p:sp>
+      <p:sp>
+        <p:nvSpPr>
+          <p:cNvPr id="5" name="Text 3"/>
+          <p:cNvSpPr/>
+          <p:nvPr/>
+        </p:nvSpPr>
+        <p:spPr>
+          <a:xfrm>
+            <a:off x="713232" y="1664208"/>
+            <a:ext cx="7498080" cy="2788920"/>
           </a:xfrm>
           <a:prstGeom prst="rect">
             <a:avLst/>
@@ -5177,128 +5531,146 @@
           <a:p>
             <a:pPr marL="342900" indent="-342900">
               <a:lnSpc>
-                <a:spcPct val="125000"/>
+                <a:spcPct val="130000"/>
               </a:lnSpc>
               <a:spcAft>
-                <a:spcPts val="800"/>
+                <a:spcPts val="1100"/>
               </a:spcAft>
               <a:buSzPct val="100000"/>
-              <a:buChar char="•"/>
-            </a:pPr>
-            <a:r>
-              <a:rPr lang="en-US" sz="1700" dirty="0">
-                <a:solidFill>
-                  <a:srgbClr val="374151"/>
-                </a:solidFill>
+              <a:buChar char="–"/>
+            </a:pPr>
+            <a:r>
+              <a:rPr lang="en-US" sz="1650" dirty="0">
+                <a:solidFill>
+                  <a:srgbClr val="23282E"/>
+                </a:solidFill>
+                <a:latin typeface="Corbel" pitchFamily="34" charset="0"/>
+                <a:ea typeface="Corbel" pitchFamily="34" charset="-122"/>
+                <a:cs typeface="Corbel" pitchFamily="34" charset="-120"/>
               </a:rPr>
               <a:t>Structure a research proposal to the standard expected by committees and funders</a:t>
             </a:r>
-            <a:endParaRPr lang="en-US" sz="1700" dirty="0"/>
+            <a:endParaRPr lang="en-US" sz="1650" dirty="0"/>
           </a:p>
           <a:p>
             <a:pPr marL="342900" indent="-342900">
               <a:lnSpc>
-                <a:spcPct val="125000"/>
+                <a:spcPct val="130000"/>
               </a:lnSpc>
               <a:spcAft>
-                <a:spcPts val="800"/>
+                <a:spcPts val="1100"/>
               </a:spcAft>
               <a:buSzPct val="100000"/>
-              <a:buChar char="•"/>
-            </a:pPr>
-            <a:r>
-              <a:rPr lang="en-US" sz="1700" dirty="0">
-                <a:solidFill>
-                  <a:srgbClr val="374151"/>
-                </a:solidFill>
+              <a:buChar char="–"/>
+            </a:pPr>
+            <a:r>
+              <a:rPr lang="en-US" sz="1650" dirty="0">
+                <a:solidFill>
+                  <a:srgbClr val="23282E"/>
+                </a:solidFill>
+                <a:latin typeface="Corbel" pitchFamily="34" charset="0"/>
+                <a:ea typeface="Corbel" pitchFamily="34" charset="-122"/>
+                <a:cs typeface="Corbel" pitchFamily="34" charset="-120"/>
               </a:rPr>
               <a:t>Write a methods section detailed enough to be reproduced</a:t>
             </a:r>
-            <a:endParaRPr lang="en-US" sz="1700" dirty="0"/>
+            <a:endParaRPr lang="en-US" sz="1650" dirty="0"/>
           </a:p>
           <a:p>
             <a:pPr marL="342900" indent="-342900">
               <a:lnSpc>
-                <a:spcPct val="125000"/>
+                <a:spcPct val="130000"/>
               </a:lnSpc>
               <a:spcAft>
-                <a:spcPts val="800"/>
+                <a:spcPts val="1100"/>
               </a:spcAft>
               <a:buSzPct val="100000"/>
-              <a:buChar char="•"/>
-            </a:pPr>
-            <a:r>
-              <a:rPr lang="en-US" sz="1700" dirty="0">
-                <a:solidFill>
-                  <a:srgbClr val="374151"/>
-                </a:solidFill>
+              <a:buChar char="–"/>
+            </a:pPr>
+            <a:r>
+              <a:rPr lang="en-US" sz="1650" dirty="0">
+                <a:solidFill>
+                  <a:srgbClr val="23282E"/>
+                </a:solidFill>
+                <a:latin typeface="Corbel" pitchFamily="34" charset="0"/>
+                <a:ea typeface="Corbel" pitchFamily="34" charset="-122"/>
+                <a:cs typeface="Corbel" pitchFamily="34" charset="-120"/>
               </a:rPr>
               <a:t>Build a realistic timeline and budget</a:t>
             </a:r>
-            <a:endParaRPr lang="en-US" sz="1700" dirty="0"/>
+            <a:endParaRPr lang="en-US" sz="1650" dirty="0"/>
           </a:p>
           <a:p>
             <a:pPr marL="342900" indent="-342900">
               <a:lnSpc>
-                <a:spcPct val="125000"/>
+                <a:spcPct val="130000"/>
               </a:lnSpc>
               <a:spcAft>
-                <a:spcPts val="800"/>
+                <a:spcPts val="1100"/>
               </a:spcAft>
               <a:buSzPct val="100000"/>
-              <a:buChar char="•"/>
-            </a:pPr>
-            <a:r>
-              <a:rPr lang="en-US" sz="1700" dirty="0">
-                <a:solidFill>
-                  <a:srgbClr val="374151"/>
-                </a:solidFill>
+              <a:buChar char="–"/>
+            </a:pPr>
+            <a:r>
+              <a:rPr lang="en-US" sz="1650" dirty="0">
+                <a:solidFill>
+                  <a:srgbClr val="23282E"/>
+                </a:solidFill>
+                <a:latin typeface="Corbel" pitchFamily="34" charset="0"/>
+                <a:ea typeface="Corbel" pitchFamily="34" charset="-122"/>
+                <a:cs typeface="Corbel" pitchFamily="34" charset="-120"/>
               </a:rPr>
               <a:t>State limitations honestly without undermining the study</a:t>
             </a:r>
-            <a:endParaRPr lang="en-US" sz="1700" dirty="0"/>
+            <a:endParaRPr lang="en-US" sz="1650" dirty="0"/>
           </a:p>
           <a:p>
             <a:pPr marL="342900" indent="-342900">
               <a:lnSpc>
-                <a:spcPct val="125000"/>
+                <a:spcPct val="130000"/>
               </a:lnSpc>
               <a:spcAft>
-                <a:spcPts val="800"/>
+                <a:spcPts val="1100"/>
               </a:spcAft>
               <a:buSzPct val="100000"/>
-              <a:buChar char="•"/>
-            </a:pPr>
-            <a:r>
-              <a:rPr lang="en-US" sz="1700" dirty="0">
-                <a:solidFill>
-                  <a:srgbClr val="374151"/>
-                </a:solidFill>
+              <a:buChar char="–"/>
+            </a:pPr>
+            <a:r>
+              <a:rPr lang="en-US" sz="1650" dirty="0">
+                <a:solidFill>
+                  <a:srgbClr val="23282E"/>
+                </a:solidFill>
+                <a:latin typeface="Corbel" pitchFamily="34" charset="0"/>
+                <a:ea typeface="Corbel" pitchFamily="34" charset="-122"/>
+                <a:cs typeface="Corbel" pitchFamily="34" charset="-120"/>
               </a:rPr>
               <a:t>Plan a data management strategy</a:t>
             </a:r>
-            <a:endParaRPr lang="en-US" sz="1700" dirty="0"/>
+            <a:endParaRPr lang="en-US" sz="1650" dirty="0"/>
           </a:p>
           <a:p>
             <a:pPr marL="342900" indent="-342900">
               <a:lnSpc>
-                <a:spcPct val="125000"/>
+                <a:spcPct val="130000"/>
               </a:lnSpc>
               <a:spcAft>
-                <a:spcPts val="800"/>
+                <a:spcPts val="1100"/>
               </a:spcAft>
               <a:buSzPct val="100000"/>
-              <a:buChar char="•"/>
-            </a:pPr>
-            <a:r>
-              <a:rPr lang="en-US" sz="1700" dirty="0">
-                <a:solidFill>
-                  <a:srgbClr val="374151"/>
-                </a:solidFill>
+              <a:buChar char="–"/>
+            </a:pPr>
+            <a:r>
+              <a:rPr lang="en-US" sz="1650" dirty="0">
+                <a:solidFill>
+                  <a:srgbClr val="23282E"/>
+                </a:solidFill>
+                <a:latin typeface="Corbel" pitchFamily="34" charset="0"/>
+                <a:ea typeface="Corbel" pitchFamily="34" charset="-122"/>
+                <a:cs typeface="Corbel" pitchFamily="34" charset="-120"/>
               </a:rPr>
               <a:t>Design a dissemination plan that reaches participants and decision makers, not only journals</a:t>
             </a:r>
-            <a:endParaRPr lang="en-US" sz="1700" dirty="0"/>
+            <a:endParaRPr lang="en-US" sz="1650" dirty="0"/>
           </a:p>
         </p:txBody>
       </p:sp>
@@ -5314,8 +5686,8 @@
         </p:nvSpPr>
         <p:spPr>
           <a:xfrm>
-            <a:off x="8503920" y="4709160"/>
-            <a:ext cx="800000" cy="300000"/>
+            <a:off x="566928" y="4700016"/>
+            <a:ext cx="914400" cy="274320"/>
           </a:xfrm>
           <a:prstGeom prst="rect">
             <a:avLst/>
@@ -5330,10 +5702,13 @@
           <a:bodyPr/>
           <a:lstStyle>
             <a:lvl1pPr>
-              <a:defRPr sz="1000">
-                <a:solidFill>
-                  <a:srgbClr val="6B7280"/>
-                </a:solidFill>
+              <a:defRPr sz="900">
+                <a:solidFill>
+                  <a:srgbClr val="5F6B76"/>
+                </a:solidFill>
+                <a:latin typeface="Corbel"/>
+                <a:ea typeface="Corbel"/>
+                <a:cs typeface="Corbel"/>
               </a:defRPr>
             </a:lvl1pPr>
           </a:lstStyle>
@@ -5380,8 +5755,8 @@
         </p:nvSpPr>
         <p:spPr>
           <a:xfrm>
-            <a:off x="502920" y="292608"/>
-            <a:ext cx="8046720" cy="228600"/>
+            <a:off x="566928" y="384048"/>
+            <a:ext cx="7772400" cy="237744"/>
           </a:xfrm>
           <a:prstGeom prst="rect">
             <a:avLst/>
@@ -5397,14 +5772,17 @@
               <a:buNone/>
             </a:pPr>
             <a:r>
-              <a:rPr lang="en-US" sz="1100" b="1" spc="150" kern="0" dirty="0">
-                <a:solidFill>
-                  <a:srgbClr val="0066CC"/>
-                </a:solidFill>
+              <a:rPr lang="en-US" sz="1000" spc="200" kern="0" dirty="0">
+                <a:solidFill>
+                  <a:srgbClr val="9A6A3C"/>
+                </a:solidFill>
+                <a:latin typeface="Corbel" pitchFamily="34" charset="0"/>
+                <a:ea typeface="Corbel" pitchFamily="34" charset="-122"/>
+                <a:cs typeface="Corbel" pitchFamily="34" charset="-120"/>
               </a:rPr>
               <a:t>UNIT 10</a:t>
             </a:r>
-            <a:endParaRPr lang="en-US" sz="1100" dirty="0"/>
+            <a:endParaRPr lang="en-US" sz="1000" dirty="0"/>
           </a:p>
         </p:txBody>
       </p:sp>
@@ -5416,8 +5794,8 @@
         </p:nvSpPr>
         <p:spPr>
           <a:xfrm>
-            <a:off x="502920" y="548640"/>
-            <a:ext cx="8046720" cy="640080"/>
+            <a:off x="566928" y="658368"/>
+            <a:ext cx="7772400" cy="658368"/>
           </a:xfrm>
           <a:prstGeom prst="rect">
             <a:avLst/>
@@ -5430,30 +5808,56 @@
           <a:lstStyle/>
           <a:p>
             <a:pPr indent="0" marL="0">
+              <a:lnSpc>
+                <a:spcPct val="100000"/>
+              </a:lnSpc>
               <a:buNone/>
             </a:pPr>
             <a:r>
-              <a:rPr lang="en-US" sz="2400" b="1" dirty="0">
-                <a:solidFill>
-                  <a:srgbClr val="111827"/>
-                </a:solidFill>
+              <a:rPr lang="en-US" sz="2500" dirty="0">
+                <a:solidFill>
+                  <a:srgbClr val="1C3140"/>
+                </a:solidFill>
+                <a:latin typeface="Constantia" pitchFamily="34" charset="0"/>
+                <a:ea typeface="Constantia" pitchFamily="34" charset="-122"/>
+                <a:cs typeface="Constantia" pitchFamily="34" charset="-120"/>
               </a:rPr>
               <a:t>Proposal structure (1/2)</a:t>
             </a:r>
-            <a:endParaRPr lang="en-US" sz="2400" dirty="0"/>
-          </a:p>
-        </p:txBody>
-      </p:sp>
-      <p:sp>
-        <p:nvSpPr>
-          <p:cNvPr id="4" name="Text 2"/>
+            <a:endParaRPr lang="en-US" sz="2500" dirty="0"/>
+          </a:p>
+        </p:txBody>
+      </p:sp>
+      <p:sp>
+        <p:nvSpPr>
+          <p:cNvPr id="4" name="Shape 2"/>
           <p:cNvSpPr/>
           <p:nvPr/>
         </p:nvSpPr>
         <p:spPr>
           <a:xfrm>
-            <a:off x="685800" y="1325880"/>
-            <a:ext cx="7772400" cy="3200400"/>
+            <a:off x="566928" y="1335024"/>
+            <a:ext cx="566928" cy="20117"/>
+          </a:xfrm>
+          <a:prstGeom prst="rect">
+            <a:avLst/>
+          </a:prstGeom>
+          <a:solidFill>
+            <a:srgbClr val="9A6A3C"/>
+          </a:solidFill>
+          <a:ln/>
+        </p:spPr>
+      </p:sp>
+      <p:sp>
+        <p:nvSpPr>
+          <p:cNvPr id="5" name="Text 3"/>
+          <p:cNvSpPr/>
+          <p:nvPr/>
+        </p:nvSpPr>
+        <p:spPr>
+          <a:xfrm>
+            <a:off x="713232" y="1664208"/>
+            <a:ext cx="7498080" cy="2788920"/>
           </a:xfrm>
           <a:prstGeom prst="rect">
             <a:avLst/>
@@ -5467,107 +5871,122 @@
           <a:p>
             <a:pPr marL="342900" indent="-342900">
               <a:lnSpc>
-                <a:spcPct val="125000"/>
+                <a:spcPct val="130000"/>
               </a:lnSpc>
               <a:spcAft>
-                <a:spcPts val="800"/>
+                <a:spcPts val="1100"/>
               </a:spcAft>
               <a:buSzPct val="100000"/>
-              <a:buChar char="•"/>
-            </a:pPr>
-            <a:r>
-              <a:rPr lang="en-US" sz="1700" dirty="0">
-                <a:solidFill>
-                  <a:srgbClr val="374151"/>
-                </a:solidFill>
+              <a:buChar char="–"/>
+            </a:pPr>
+            <a:r>
+              <a:rPr lang="en-US" sz="1650" dirty="0">
+                <a:solidFill>
+                  <a:srgbClr val="23282E"/>
+                </a:solidFill>
+                <a:latin typeface="Corbel" pitchFamily="34" charset="0"/>
+                <a:ea typeface="Corbel" pitchFamily="34" charset="-122"/>
+                <a:cs typeface="Corbel" pitchFamily="34" charset="-120"/>
               </a:rPr>
               <a:t>Title — specific, informative, usually naming design, population and setting</a:t>
             </a:r>
-            <a:endParaRPr lang="en-US" sz="1700" dirty="0"/>
+            <a:endParaRPr lang="en-US" sz="1650" dirty="0"/>
           </a:p>
           <a:p>
             <a:pPr marL="342900" indent="-342900">
               <a:lnSpc>
-                <a:spcPct val="125000"/>
+                <a:spcPct val="130000"/>
               </a:lnSpc>
               <a:spcAft>
-                <a:spcPts val="800"/>
+                <a:spcPts val="1100"/>
               </a:spcAft>
               <a:buSzPct val="100000"/>
-              <a:buChar char="•"/>
-            </a:pPr>
-            <a:r>
-              <a:rPr lang="en-US" sz="1700" dirty="0">
-                <a:solidFill>
-                  <a:srgbClr val="374151"/>
-                </a:solidFill>
+              <a:buChar char="–"/>
+            </a:pPr>
+            <a:r>
+              <a:rPr lang="en-US" sz="1650" dirty="0">
+                <a:solidFill>
+                  <a:srgbClr val="23282E"/>
+                </a:solidFill>
+                <a:latin typeface="Corbel" pitchFamily="34" charset="0"/>
+                <a:ea typeface="Corbel" pitchFamily="34" charset="-122"/>
+                <a:cs typeface="Corbel" pitchFamily="34" charset="-120"/>
               </a:rPr>
               <a:t>Abstract — written last, covering background, aim, methods, expected outcomes; respect the word limit exactly</a:t>
             </a:r>
-            <a:endParaRPr lang="en-US" sz="1700" dirty="0"/>
+            <a:endParaRPr lang="en-US" sz="1650" dirty="0"/>
           </a:p>
           <a:p>
             <a:pPr marL="342900" indent="-342900">
               <a:lnSpc>
-                <a:spcPct val="125000"/>
+                <a:spcPct val="130000"/>
               </a:lnSpc>
               <a:spcAft>
-                <a:spcPts val="800"/>
+                <a:spcPts val="1100"/>
               </a:spcAft>
               <a:buSzPct val="100000"/>
-              <a:buChar char="•"/>
-            </a:pPr>
-            <a:r>
-              <a:rPr lang="en-US" sz="1700" dirty="0">
-                <a:solidFill>
-                  <a:srgbClr val="374151"/>
-                </a:solidFill>
+              <a:buChar char="–"/>
+            </a:pPr>
+            <a:r>
+              <a:rPr lang="en-US" sz="1650" dirty="0">
+                <a:solidFill>
+                  <a:srgbClr val="23282E"/>
+                </a:solidFill>
+                <a:latin typeface="Corbel" pitchFamily="34" charset="0"/>
+                <a:ea typeface="Corbel" pitchFamily="34" charset="-122"/>
+                <a:cs typeface="Corbel" pitchFamily="34" charset="-120"/>
               </a:rPr>
               <a:t>Introduction and background — the problem, its magnitude, and the gap</a:t>
             </a:r>
-            <a:endParaRPr lang="en-US" sz="1700" dirty="0"/>
+            <a:endParaRPr lang="en-US" sz="1650" dirty="0"/>
           </a:p>
           <a:p>
             <a:pPr marL="342900" indent="-342900">
               <a:lnSpc>
-                <a:spcPct val="125000"/>
+                <a:spcPct val="130000"/>
               </a:lnSpc>
               <a:spcAft>
-                <a:spcPts val="800"/>
+                <a:spcPts val="1100"/>
               </a:spcAft>
               <a:buSzPct val="100000"/>
-              <a:buChar char="•"/>
-            </a:pPr>
-            <a:r>
-              <a:rPr lang="en-US" sz="1700" dirty="0">
-                <a:solidFill>
-                  <a:srgbClr val="374151"/>
-                </a:solidFill>
+              <a:buChar char="–"/>
+            </a:pPr>
+            <a:r>
+              <a:rPr lang="en-US" sz="1650" dirty="0">
+                <a:solidFill>
+                  <a:srgbClr val="23282E"/>
+                </a:solidFill>
+                <a:latin typeface="Corbel" pitchFamily="34" charset="0"/>
+                <a:ea typeface="Corbel" pitchFamily="34" charset="-122"/>
+                <a:cs typeface="Corbel" pitchFamily="34" charset="-120"/>
               </a:rPr>
               <a:t>Literature review — the argument leading to your question</a:t>
             </a:r>
-            <a:endParaRPr lang="en-US" sz="1700" dirty="0"/>
+            <a:endParaRPr lang="en-US" sz="1650" dirty="0"/>
           </a:p>
           <a:p>
             <a:pPr marL="342900" indent="-342900">
               <a:lnSpc>
-                <a:spcPct val="125000"/>
+                <a:spcPct val="130000"/>
               </a:lnSpc>
               <a:spcAft>
-                <a:spcPts val="800"/>
+                <a:spcPts val="1100"/>
               </a:spcAft>
               <a:buSzPct val="100000"/>
-              <a:buChar char="•"/>
-            </a:pPr>
-            <a:r>
-              <a:rPr lang="en-US" sz="1700" dirty="0">
-                <a:solidFill>
-                  <a:srgbClr val="374151"/>
-                </a:solidFill>
+              <a:buChar char="–"/>
+            </a:pPr>
+            <a:r>
+              <a:rPr lang="en-US" sz="1650" dirty="0">
+                <a:solidFill>
+                  <a:srgbClr val="23282E"/>
+                </a:solidFill>
+                <a:latin typeface="Corbel" pitchFamily="34" charset="0"/>
+                <a:ea typeface="Corbel" pitchFamily="34" charset="-122"/>
+                <a:cs typeface="Corbel" pitchFamily="34" charset="-120"/>
               </a:rPr>
               <a:t>Aim, objectives, research questions and hypotheses</a:t>
             </a:r>
-            <a:endParaRPr lang="en-US" sz="1700" dirty="0"/>
+            <a:endParaRPr lang="en-US" sz="1650" dirty="0"/>
           </a:p>
         </p:txBody>
       </p:sp>
@@ -5583,8 +6002,8 @@
         </p:nvSpPr>
         <p:spPr>
           <a:xfrm>
-            <a:off x="8503920" y="4709160"/>
-            <a:ext cx="800000" cy="300000"/>
+            <a:off x="566928" y="4700016"/>
+            <a:ext cx="914400" cy="274320"/>
           </a:xfrm>
           <a:prstGeom prst="rect">
             <a:avLst/>
@@ -5599,10 +6018,13 @@
           <a:bodyPr/>
           <a:lstStyle>
             <a:lvl1pPr>
-              <a:defRPr sz="1000">
-                <a:solidFill>
-                  <a:srgbClr val="6B7280"/>
-                </a:solidFill>
+              <a:defRPr sz="900">
+                <a:solidFill>
+                  <a:srgbClr val="5F6B76"/>
+                </a:solidFill>
+                <a:latin typeface="Corbel"/>
+                <a:ea typeface="Corbel"/>
+                <a:cs typeface="Corbel"/>
               </a:defRPr>
             </a:lvl1pPr>
           </a:lstStyle>
@@ -5649,8 +6071,8 @@
         </p:nvSpPr>
         <p:spPr>
           <a:xfrm>
-            <a:off x="502920" y="292608"/>
-            <a:ext cx="8046720" cy="228600"/>
+            <a:off x="566928" y="384048"/>
+            <a:ext cx="7772400" cy="237744"/>
           </a:xfrm>
           <a:prstGeom prst="rect">
             <a:avLst/>
@@ -5666,14 +6088,17 @@
               <a:buNone/>
             </a:pPr>
             <a:r>
-              <a:rPr lang="en-US" sz="1100" b="1" spc="150" kern="0" dirty="0">
-                <a:solidFill>
-                  <a:srgbClr val="0066CC"/>
-                </a:solidFill>
+              <a:rPr lang="en-US" sz="1000" spc="200" kern="0" dirty="0">
+                <a:solidFill>
+                  <a:srgbClr val="9A6A3C"/>
+                </a:solidFill>
+                <a:latin typeface="Corbel" pitchFamily="34" charset="0"/>
+                <a:ea typeface="Corbel" pitchFamily="34" charset="-122"/>
+                <a:cs typeface="Corbel" pitchFamily="34" charset="-120"/>
               </a:rPr>
               <a:t>UNIT 10</a:t>
             </a:r>
-            <a:endParaRPr lang="en-US" sz="1100" dirty="0"/>
+            <a:endParaRPr lang="en-US" sz="1000" dirty="0"/>
           </a:p>
         </p:txBody>
       </p:sp>
@@ -5685,8 +6110,8 @@
         </p:nvSpPr>
         <p:spPr>
           <a:xfrm>
-            <a:off x="502920" y="548640"/>
-            <a:ext cx="8046720" cy="640080"/>
+            <a:off x="566928" y="658368"/>
+            <a:ext cx="7772400" cy="658368"/>
           </a:xfrm>
           <a:prstGeom prst="rect">
             <a:avLst/>
@@ -5699,30 +6124,56 @@
           <a:lstStyle/>
           <a:p>
             <a:pPr indent="0" marL="0">
+              <a:lnSpc>
+                <a:spcPct val="100000"/>
+              </a:lnSpc>
               <a:buNone/>
             </a:pPr>
             <a:r>
-              <a:rPr lang="en-US" sz="2400" b="1" dirty="0">
-                <a:solidFill>
-                  <a:srgbClr val="111827"/>
-                </a:solidFill>
+              <a:rPr lang="en-US" sz="2500" dirty="0">
+                <a:solidFill>
+                  <a:srgbClr val="1C3140"/>
+                </a:solidFill>
+                <a:latin typeface="Constantia" pitchFamily="34" charset="0"/>
+                <a:ea typeface="Constantia" pitchFamily="34" charset="-122"/>
+                <a:cs typeface="Constantia" pitchFamily="34" charset="-120"/>
               </a:rPr>
               <a:t>Proposal structure (2/2)</a:t>
             </a:r>
-            <a:endParaRPr lang="en-US" sz="2400" dirty="0"/>
-          </a:p>
-        </p:txBody>
-      </p:sp>
-      <p:sp>
-        <p:nvSpPr>
-          <p:cNvPr id="4" name="Text 2"/>
+            <a:endParaRPr lang="en-US" sz="2500" dirty="0"/>
+          </a:p>
+        </p:txBody>
+      </p:sp>
+      <p:sp>
+        <p:nvSpPr>
+          <p:cNvPr id="4" name="Shape 2"/>
           <p:cNvSpPr/>
           <p:nvPr/>
         </p:nvSpPr>
         <p:spPr>
           <a:xfrm>
-            <a:off x="685800" y="1325880"/>
-            <a:ext cx="7772400" cy="3200400"/>
+            <a:off x="566928" y="1335024"/>
+            <a:ext cx="566928" cy="20117"/>
+          </a:xfrm>
+          <a:prstGeom prst="rect">
+            <a:avLst/>
+          </a:prstGeom>
+          <a:solidFill>
+            <a:srgbClr val="9A6A3C"/>
+          </a:solidFill>
+          <a:ln/>
+        </p:spPr>
+      </p:sp>
+      <p:sp>
+        <p:nvSpPr>
+          <p:cNvPr id="5" name="Text 3"/>
+          <p:cNvSpPr/>
+          <p:nvPr/>
+        </p:nvSpPr>
+        <p:spPr>
+          <a:xfrm>
+            <a:off x="713232" y="1664208"/>
+            <a:ext cx="7498080" cy="2788920"/>
           </a:xfrm>
           <a:prstGeom prst="rect">
             <a:avLst/>
@@ -5736,19 +6187,22 @@
           <a:p>
             <a:pPr marL="342900" indent="-342900">
               <a:lnSpc>
-                <a:spcPct val="125000"/>
+                <a:spcPct val="130000"/>
               </a:lnSpc>
               <a:spcAft>
-                <a:spcPts val="800"/>
+                <a:spcPts val="1100"/>
               </a:spcAft>
               <a:buSzPct val="100000"/>
-              <a:buChar char="•"/>
+              <a:buChar char="–"/>
             </a:pPr>
             <a:r>
               <a:rPr lang="en-US" sz="1500" dirty="0">
                 <a:solidFill>
-                  <a:srgbClr val="374151"/>
-                </a:solidFill>
+                  <a:srgbClr val="23282E"/>
+                </a:solidFill>
+                <a:latin typeface="Corbel" pitchFamily="34" charset="0"/>
+                <a:ea typeface="Corbel" pitchFamily="34" charset="-122"/>
+                <a:cs typeface="Corbel" pitchFamily="34" charset="-120"/>
               </a:rPr>
               <a:t>Methodology — design, setting, population, sampling, sample size, instruments, procedures, analysis plan</a:t>
             </a:r>
@@ -5757,19 +6211,22 @@
           <a:p>
             <a:pPr marL="342900" indent="-342900">
               <a:lnSpc>
-                <a:spcPct val="125000"/>
+                <a:spcPct val="130000"/>
               </a:lnSpc>
               <a:spcAft>
-                <a:spcPts val="800"/>
+                <a:spcPts val="1100"/>
               </a:spcAft>
               <a:buSzPct val="100000"/>
-              <a:buChar char="•"/>
+              <a:buChar char="–"/>
             </a:pPr>
             <a:r>
               <a:rPr lang="en-US" sz="1500" dirty="0">
                 <a:solidFill>
-                  <a:srgbClr val="374151"/>
-                </a:solidFill>
+                  <a:srgbClr val="23282E"/>
+                </a:solidFill>
+                <a:latin typeface="Corbel" pitchFamily="34" charset="0"/>
+                <a:ea typeface="Corbel" pitchFamily="34" charset="-122"/>
+                <a:cs typeface="Corbel" pitchFamily="34" charset="-120"/>
               </a:rPr>
               <a:t>Ethical considerations — approvals sought, consent, confidentiality, risk mitigation</a:t>
             </a:r>
@@ -5778,19 +6235,22 @@
           <a:p>
             <a:pPr marL="342900" indent="-342900">
               <a:lnSpc>
-                <a:spcPct val="125000"/>
+                <a:spcPct val="130000"/>
               </a:lnSpc>
               <a:spcAft>
-                <a:spcPts val="800"/>
+                <a:spcPts val="1100"/>
               </a:spcAft>
               <a:buSzPct val="100000"/>
-              <a:buChar char="•"/>
+              <a:buChar char="–"/>
             </a:pPr>
             <a:r>
               <a:rPr lang="en-US" sz="1500" dirty="0">
                 <a:solidFill>
-                  <a:srgbClr val="374151"/>
-                </a:solidFill>
+                  <a:srgbClr val="23282E"/>
+                </a:solidFill>
+                <a:latin typeface="Corbel" pitchFamily="34" charset="0"/>
+                <a:ea typeface="Corbel" pitchFamily="34" charset="-122"/>
+                <a:cs typeface="Corbel" pitchFamily="34" charset="-120"/>
               </a:rPr>
               <a:t>Timeline, budget, references, appendices with instruments and consent forms</a:t>
             </a:r>
@@ -5799,19 +6259,22 @@
           <a:p>
             <a:pPr marL="342900" indent="-342900">
               <a:lnSpc>
-                <a:spcPct val="125000"/>
+                <a:spcPct val="130000"/>
               </a:lnSpc>
               <a:spcAft>
-                <a:spcPts val="800"/>
+                <a:spcPts val="1100"/>
               </a:spcAft>
               <a:buSzPct val="100000"/>
-              <a:buChar char="•"/>
+              <a:buChar char="–"/>
             </a:pPr>
             <a:r>
               <a:rPr lang="en-US" sz="1500" dirty="0">
                 <a:solidFill>
-                  <a:srgbClr val="374151"/>
-                </a:solidFill>
+                  <a:srgbClr val="23282E"/>
+                </a:solidFill>
+                <a:latin typeface="Corbel" pitchFamily="34" charset="0"/>
+                <a:ea typeface="Corbel" pitchFamily="34" charset="-122"/>
+                <a:cs typeface="Corbel" pitchFamily="34" charset="-120"/>
               </a:rPr>
               <a:t>Reviewers commonly read the aim, then jump to sampling, sample size and analysis — those must survive isolated scrutiny</a:t>
             </a:r>
@@ -5831,8 +6294,8 @@
         </p:nvSpPr>
         <p:spPr>
           <a:xfrm>
-            <a:off x="8503920" y="4709160"/>
-            <a:ext cx="800000" cy="300000"/>
+            <a:off x="566928" y="4700016"/>
+            <a:ext cx="914400" cy="274320"/>
           </a:xfrm>
           <a:prstGeom prst="rect">
             <a:avLst/>
@@ -5847,10 +6310,13 @@
           <a:bodyPr/>
           <a:lstStyle>
             <a:lvl1pPr>
-              <a:defRPr sz="1000">
-                <a:solidFill>
-                  <a:srgbClr val="6B7280"/>
-                </a:solidFill>
+              <a:defRPr sz="900">
+                <a:solidFill>
+                  <a:srgbClr val="5F6B76"/>
+                </a:solidFill>
+                <a:latin typeface="Corbel"/>
+                <a:ea typeface="Corbel"/>
+                <a:cs typeface="Corbel"/>
               </a:defRPr>
             </a:lvl1pPr>
           </a:lstStyle>
@@ -5897,8 +6363,8 @@
         </p:nvSpPr>
         <p:spPr>
           <a:xfrm>
-            <a:off x="502920" y="292608"/>
-            <a:ext cx="8046720" cy="228600"/>
+            <a:off x="566928" y="384048"/>
+            <a:ext cx="7772400" cy="237744"/>
           </a:xfrm>
           <a:prstGeom prst="rect">
             <a:avLst/>
@@ -5914,14 +6380,17 @@
               <a:buNone/>
             </a:pPr>
             <a:r>
-              <a:rPr lang="en-US" sz="1100" b="1" spc="150" kern="0" dirty="0">
-                <a:solidFill>
-                  <a:srgbClr val="0066CC"/>
-                </a:solidFill>
+              <a:rPr lang="en-US" sz="1000" spc="200" kern="0" dirty="0">
+                <a:solidFill>
+                  <a:srgbClr val="9A6A3C"/>
+                </a:solidFill>
+                <a:latin typeface="Corbel" pitchFamily="34" charset="0"/>
+                <a:ea typeface="Corbel" pitchFamily="34" charset="-122"/>
+                <a:cs typeface="Corbel" pitchFamily="34" charset="-120"/>
               </a:rPr>
               <a:t>UNIT 10</a:t>
             </a:r>
-            <a:endParaRPr lang="en-US" sz="1100" dirty="0"/>
+            <a:endParaRPr lang="en-US" sz="1000" dirty="0"/>
           </a:p>
         </p:txBody>
       </p:sp>
@@ -5933,8 +6402,8 @@
         </p:nvSpPr>
         <p:spPr>
           <a:xfrm>
-            <a:off x="502920" y="548640"/>
-            <a:ext cx="8046720" cy="640080"/>
+            <a:off x="566928" y="658368"/>
+            <a:ext cx="7772400" cy="658368"/>
           </a:xfrm>
           <a:prstGeom prst="rect">
             <a:avLst/>
@@ -5947,30 +6416,56 @@
           <a:lstStyle/>
           <a:p>
             <a:pPr indent="0" marL="0">
+              <a:lnSpc>
+                <a:spcPct val="100000"/>
+              </a:lnSpc>
               <a:buNone/>
             </a:pPr>
             <a:r>
-              <a:rPr lang="en-US" sz="2400" b="1" dirty="0">
-                <a:solidFill>
-                  <a:srgbClr val="111827"/>
-                </a:solidFill>
+              <a:rPr lang="en-US" sz="2500" dirty="0">
+                <a:solidFill>
+                  <a:srgbClr val="1C3140"/>
+                </a:solidFill>
+                <a:latin typeface="Constantia" pitchFamily="34" charset="0"/>
+                <a:ea typeface="Constantia" pitchFamily="34" charset="-122"/>
+                <a:cs typeface="Constantia" pitchFamily="34" charset="-120"/>
               </a:rPr>
               <a:t>The methods section (1/2)</a:t>
             </a:r>
-            <a:endParaRPr lang="en-US" sz="2400" dirty="0"/>
-          </a:p>
-        </p:txBody>
-      </p:sp>
-      <p:sp>
-        <p:nvSpPr>
-          <p:cNvPr id="4" name="Text 2"/>
+            <a:endParaRPr lang="en-US" sz="2500" dirty="0"/>
+          </a:p>
+        </p:txBody>
+      </p:sp>
+      <p:sp>
+        <p:nvSpPr>
+          <p:cNvPr id="4" name="Shape 2"/>
           <p:cNvSpPr/>
           <p:nvPr/>
         </p:nvSpPr>
         <p:spPr>
           <a:xfrm>
-            <a:off x="685800" y="1325880"/>
-            <a:ext cx="7772400" cy="3200400"/>
+            <a:off x="566928" y="1335024"/>
+            <a:ext cx="566928" cy="20117"/>
+          </a:xfrm>
+          <a:prstGeom prst="rect">
+            <a:avLst/>
+          </a:prstGeom>
+          <a:solidFill>
+            <a:srgbClr val="9A6A3C"/>
+          </a:solidFill>
+          <a:ln/>
+        </p:spPr>
+      </p:sp>
+      <p:sp>
+        <p:nvSpPr>
+          <p:cNvPr id="5" name="Text 3"/>
+          <p:cNvSpPr/>
+          <p:nvPr/>
+        </p:nvSpPr>
+        <p:spPr>
+          <a:xfrm>
+            <a:off x="713232" y="1664208"/>
+            <a:ext cx="7498080" cy="2788920"/>
           </a:xfrm>
           <a:prstGeom prst="rect">
             <a:avLst/>
@@ -5984,107 +6479,122 @@
           <a:p>
             <a:pPr marL="342900" indent="-342900">
               <a:lnSpc>
-                <a:spcPct val="125000"/>
+                <a:spcPct val="130000"/>
               </a:lnSpc>
               <a:spcAft>
-                <a:spcPts val="800"/>
+                <a:spcPts val="1100"/>
               </a:spcAft>
               <a:buSzPct val="100000"/>
-              <a:buChar char="•"/>
-            </a:pPr>
-            <a:r>
-              <a:rPr lang="en-US" sz="1700" dirty="0">
-                <a:solidFill>
-                  <a:srgbClr val="374151"/>
-                </a:solidFill>
+              <a:buChar char="–"/>
+            </a:pPr>
+            <a:r>
+              <a:rPr lang="en-US" sz="1650" dirty="0">
+                <a:solidFill>
+                  <a:srgbClr val="23282E"/>
+                </a:solidFill>
+                <a:latin typeface="Corbel" pitchFamily="34" charset="0"/>
+                <a:ea typeface="Corbel" pitchFamily="34" charset="-122"/>
+                <a:cs typeface="Corbel" pitchFamily="34" charset="-120"/>
               </a:rPr>
               <a:t>The test is reproducibility: could a competent stranger repeat this from what you wrote?</a:t>
             </a:r>
-            <a:endParaRPr lang="en-US" sz="1700" dirty="0"/>
+            <a:endParaRPr lang="en-US" sz="1650" dirty="0"/>
           </a:p>
           <a:p>
             <a:pPr marL="342900" indent="-342900">
               <a:lnSpc>
-                <a:spcPct val="125000"/>
+                <a:spcPct val="130000"/>
               </a:lnSpc>
               <a:spcAft>
-                <a:spcPts val="800"/>
+                <a:spcPts val="1100"/>
               </a:spcAft>
               <a:buSzPct val="100000"/>
-              <a:buChar char="•"/>
-            </a:pPr>
-            <a:r>
-              <a:rPr lang="en-US" sz="1700" dirty="0">
-                <a:solidFill>
-                  <a:srgbClr val="374151"/>
-                </a:solidFill>
+              <a:buChar char="–"/>
+            </a:pPr>
+            <a:r>
+              <a:rPr lang="en-US" sz="1650" dirty="0">
+                <a:solidFill>
+                  <a:srgbClr val="23282E"/>
+                </a:solidFill>
+                <a:latin typeface="Corbel" pitchFamily="34" charset="0"/>
+                <a:ea typeface="Corbel" pitchFamily="34" charset="-122"/>
+                <a:cs typeface="Corbel" pitchFamily="34" charset="-120"/>
               </a:rPr>
               <a:t>Specify inclusion and exclusion criteria at the level of the individual participant</a:t>
             </a:r>
-            <a:endParaRPr lang="en-US" sz="1700" dirty="0"/>
+            <a:endParaRPr lang="en-US" sz="1650" dirty="0"/>
           </a:p>
           <a:p>
             <a:pPr marL="342900" indent="-342900">
               <a:lnSpc>
-                <a:spcPct val="125000"/>
+                <a:spcPct val="130000"/>
               </a:lnSpc>
               <a:spcAft>
-                <a:spcPts val="800"/>
+                <a:spcPts val="1100"/>
               </a:spcAft>
               <a:buSzPct val="100000"/>
-              <a:buChar char="•"/>
-            </a:pPr>
-            <a:r>
-              <a:rPr lang="en-US" sz="1700" dirty="0">
-                <a:solidFill>
-                  <a:srgbClr val="374151"/>
-                </a:solidFill>
+              <a:buChar char="–"/>
+            </a:pPr>
+            <a:r>
+              <a:rPr lang="en-US" sz="1650" dirty="0">
+                <a:solidFill>
+                  <a:srgbClr val="23282E"/>
+                </a:solidFill>
+                <a:latin typeface="Corbel" pitchFamily="34" charset="0"/>
+                <a:ea typeface="Corbel" pitchFamily="34" charset="-122"/>
+                <a:cs typeface="Corbel" pitchFamily="34" charset="-120"/>
               </a:rPr>
               <a:t>State the sample size calculation with every input, not just the result</a:t>
             </a:r>
-            <a:endParaRPr lang="en-US" sz="1700" dirty="0"/>
+            <a:endParaRPr lang="en-US" sz="1650" dirty="0"/>
           </a:p>
           <a:p>
             <a:pPr marL="342900" indent="-342900">
               <a:lnSpc>
-                <a:spcPct val="125000"/>
+                <a:spcPct val="130000"/>
               </a:lnSpc>
               <a:spcAft>
-                <a:spcPts val="800"/>
+                <a:spcPts val="1100"/>
               </a:spcAft>
               <a:buSzPct val="100000"/>
-              <a:buChar char="•"/>
-            </a:pPr>
-            <a:r>
-              <a:rPr lang="en-US" sz="1700" dirty="0">
-                <a:solidFill>
-                  <a:srgbClr val="374151"/>
-                </a:solidFill>
+              <a:buChar char="–"/>
+            </a:pPr>
+            <a:r>
+              <a:rPr lang="en-US" sz="1650" dirty="0">
+                <a:solidFill>
+                  <a:srgbClr val="23282E"/>
+                </a:solidFill>
+                <a:latin typeface="Corbel" pitchFamily="34" charset="0"/>
+                <a:ea typeface="Corbel" pitchFamily="34" charset="-122"/>
+                <a:cs typeface="Corbel" pitchFamily="34" charset="-120"/>
               </a:rPr>
               <a:t>Name the statistical tests against each objective, and say how missing data and confounding will be handled</a:t>
             </a:r>
-            <a:endParaRPr lang="en-US" sz="1700" dirty="0"/>
+            <a:endParaRPr lang="en-US" sz="1650" dirty="0"/>
           </a:p>
           <a:p>
             <a:pPr marL="342900" indent="-342900">
               <a:lnSpc>
-                <a:spcPct val="125000"/>
+                <a:spcPct val="130000"/>
               </a:lnSpc>
               <a:spcAft>
-                <a:spcPts val="800"/>
+                <a:spcPts val="1100"/>
               </a:spcAft>
               <a:buSzPct val="100000"/>
-              <a:buChar char="•"/>
-            </a:pPr>
-            <a:r>
-              <a:rPr lang="en-US" sz="1700" dirty="0">
-                <a:solidFill>
-                  <a:srgbClr val="374151"/>
-                </a:solidFill>
+              <a:buChar char="–"/>
+            </a:pPr>
+            <a:r>
+              <a:rPr lang="en-US" sz="1650" dirty="0">
+                <a:solidFill>
+                  <a:srgbClr val="23282E"/>
+                </a:solidFill>
+                <a:latin typeface="Corbel" pitchFamily="34" charset="0"/>
+                <a:ea typeface="Corbel" pitchFamily="34" charset="-122"/>
+                <a:cs typeface="Corbel" pitchFamily="34" charset="-120"/>
               </a:rPr>
               <a:t>Pre-specify the analysis plan; deciding tests after seeing the data invites accusations of p-hacking</a:t>
             </a:r>
-            <a:endParaRPr lang="en-US" sz="1700" dirty="0"/>
+            <a:endParaRPr lang="en-US" sz="1650" dirty="0"/>
           </a:p>
         </p:txBody>
       </p:sp>
@@ -6100,8 +6610,8 @@
         </p:nvSpPr>
         <p:spPr>
           <a:xfrm>
-            <a:off x="8503920" y="4709160"/>
-            <a:ext cx="800000" cy="300000"/>
+            <a:off x="566928" y="4700016"/>
+            <a:ext cx="914400" cy="274320"/>
           </a:xfrm>
           <a:prstGeom prst="rect">
             <a:avLst/>
@@ -6116,10 +6626,13 @@
           <a:bodyPr/>
           <a:lstStyle>
             <a:lvl1pPr>
-              <a:defRPr sz="1000">
-                <a:solidFill>
-                  <a:srgbClr val="6B7280"/>
-                </a:solidFill>
+              <a:defRPr sz="900">
+                <a:solidFill>
+                  <a:srgbClr val="5F6B76"/>
+                </a:solidFill>
+                <a:latin typeface="Corbel"/>
+                <a:ea typeface="Corbel"/>
+                <a:cs typeface="Corbel"/>
               </a:defRPr>
             </a:lvl1pPr>
           </a:lstStyle>
@@ -6166,8 +6679,8 @@
         </p:nvSpPr>
         <p:spPr>
           <a:xfrm>
-            <a:off x="502920" y="292608"/>
-            <a:ext cx="8046720" cy="228600"/>
+            <a:off x="566928" y="384048"/>
+            <a:ext cx="7772400" cy="237744"/>
           </a:xfrm>
           <a:prstGeom prst="rect">
             <a:avLst/>
@@ -6183,14 +6696,17 @@
               <a:buNone/>
             </a:pPr>
             <a:r>
-              <a:rPr lang="en-US" sz="1100" b="1" spc="150" kern="0" dirty="0">
-                <a:solidFill>
-                  <a:srgbClr val="0066CC"/>
-                </a:solidFill>
+              <a:rPr lang="en-US" sz="1000" spc="200" kern="0" dirty="0">
+                <a:solidFill>
+                  <a:srgbClr val="9A6A3C"/>
+                </a:solidFill>
+                <a:latin typeface="Corbel" pitchFamily="34" charset="0"/>
+                <a:ea typeface="Corbel" pitchFamily="34" charset="-122"/>
+                <a:cs typeface="Corbel" pitchFamily="34" charset="-120"/>
               </a:rPr>
               <a:t>UNIT 10</a:t>
             </a:r>
-            <a:endParaRPr lang="en-US" sz="1100" dirty="0"/>
+            <a:endParaRPr lang="en-US" sz="1000" dirty="0"/>
           </a:p>
         </p:txBody>
       </p:sp>
@@ -6202,8 +6718,8 @@
         </p:nvSpPr>
         <p:spPr>
           <a:xfrm>
-            <a:off x="502920" y="548640"/>
-            <a:ext cx="8046720" cy="640080"/>
+            <a:off x="566928" y="658368"/>
+            <a:ext cx="7772400" cy="658368"/>
           </a:xfrm>
           <a:prstGeom prst="rect">
             <a:avLst/>
@@ -6216,30 +6732,56 @@
           <a:lstStyle/>
           <a:p>
             <a:pPr indent="0" marL="0">
+              <a:lnSpc>
+                <a:spcPct val="100000"/>
+              </a:lnSpc>
               <a:buNone/>
             </a:pPr>
             <a:r>
-              <a:rPr lang="en-US" sz="2400" b="1" dirty="0">
-                <a:solidFill>
-                  <a:srgbClr val="111827"/>
-                </a:solidFill>
+              <a:rPr lang="en-US" sz="2500" dirty="0">
+                <a:solidFill>
+                  <a:srgbClr val="1C3140"/>
+                </a:solidFill>
+                <a:latin typeface="Constantia" pitchFamily="34" charset="0"/>
+                <a:ea typeface="Constantia" pitchFamily="34" charset="-122"/>
+                <a:cs typeface="Constantia" pitchFamily="34" charset="-120"/>
               </a:rPr>
               <a:t>The methods section (2/2)</a:t>
             </a:r>
-            <a:endParaRPr lang="en-US" sz="2400" dirty="0"/>
-          </a:p>
-        </p:txBody>
-      </p:sp>
-      <p:sp>
-        <p:nvSpPr>
-          <p:cNvPr id="4" name="Text 2"/>
+            <a:endParaRPr lang="en-US" sz="2500" dirty="0"/>
+          </a:p>
+        </p:txBody>
+      </p:sp>
+      <p:sp>
+        <p:nvSpPr>
+          <p:cNvPr id="4" name="Shape 2"/>
           <p:cNvSpPr/>
           <p:nvPr/>
         </p:nvSpPr>
         <p:spPr>
           <a:xfrm>
-            <a:off x="685800" y="1325880"/>
-            <a:ext cx="7772400" cy="3200400"/>
+            <a:off x="566928" y="1335024"/>
+            <a:ext cx="566928" cy="20117"/>
+          </a:xfrm>
+          <a:prstGeom prst="rect">
+            <a:avLst/>
+          </a:prstGeom>
+          <a:solidFill>
+            <a:srgbClr val="9A6A3C"/>
+          </a:solidFill>
+          <a:ln/>
+        </p:spPr>
+      </p:sp>
+      <p:sp>
+        <p:nvSpPr>
+          <p:cNvPr id="5" name="Text 3"/>
+          <p:cNvSpPr/>
+          <p:nvPr/>
+        </p:nvSpPr>
+        <p:spPr>
+          <a:xfrm>
+            <a:off x="713232" y="1664208"/>
+            <a:ext cx="7498080" cy="2788920"/>
           </a:xfrm>
           <a:prstGeom prst="rect">
             <a:avLst/>
@@ -6253,44 +6795,50 @@
           <a:p>
             <a:pPr marL="342900" indent="-342900">
               <a:lnSpc>
-                <a:spcPct val="125000"/>
+                <a:spcPct val="130000"/>
               </a:lnSpc>
               <a:spcAft>
-                <a:spcPts val="800"/>
+                <a:spcPts val="1100"/>
               </a:spcAft>
               <a:buSzPct val="100000"/>
-              <a:buChar char="•"/>
-            </a:pPr>
-            <a:r>
-              <a:rPr lang="en-US" sz="1300" dirty="0">
-                <a:solidFill>
-                  <a:srgbClr val="374151"/>
-                </a:solidFill>
+              <a:buChar char="–"/>
+            </a:pPr>
+            <a:r>
+              <a:rPr lang="en-US" sz="1350" dirty="0">
+                <a:solidFill>
+                  <a:srgbClr val="23282E"/>
+                </a:solidFill>
+                <a:latin typeface="Corbel" pitchFamily="34" charset="0"/>
+                <a:ea typeface="Corbel" pitchFamily="34" charset="-122"/>
+                <a:cs typeface="Corbel" pitchFamily="34" charset="-120"/>
               </a:rPr>
               <a:t>For qualitative work, state the analytic approach, who will code, and how disagreements will be resolved</a:t>
             </a:r>
-            <a:endParaRPr lang="en-US" sz="1300" dirty="0"/>
+            <a:endParaRPr lang="en-US" sz="1350" dirty="0"/>
           </a:p>
           <a:p>
             <a:pPr marL="342900" indent="-342900">
               <a:lnSpc>
-                <a:spcPct val="125000"/>
+                <a:spcPct val="130000"/>
               </a:lnSpc>
               <a:spcAft>
-                <a:spcPts val="800"/>
+                <a:spcPts val="1100"/>
               </a:spcAft>
               <a:buSzPct val="100000"/>
-              <a:buChar char="•"/>
-            </a:pPr>
-            <a:r>
-              <a:rPr lang="en-US" sz="1300" dirty="0">
-                <a:solidFill>
-                  <a:srgbClr val="374151"/>
-                </a:solidFill>
+              <a:buChar char="–"/>
+            </a:pPr>
+            <a:r>
+              <a:rPr lang="en-US" sz="1350" dirty="0">
+                <a:solidFill>
+                  <a:srgbClr val="23282E"/>
+                </a:solidFill>
+                <a:latin typeface="Corbel" pitchFamily="34" charset="0"/>
+                <a:ea typeface="Corbel" pitchFamily="34" charset="-122"/>
+                <a:cs typeface="Corbel" pitchFamily="34" charset="-120"/>
               </a:rPr>
               <a:t>Use the relevant reporting checklist while writing rather than afterwards: CONSORT for trials, STROBE for observational studies, COREQ or SRQR for qualitative work, PRISMA for reviews</a:t>
             </a:r>
-            <a:endParaRPr lang="en-US" sz="1300" dirty="0"/>
+            <a:endParaRPr lang="en-US" sz="1350" dirty="0"/>
           </a:p>
         </p:txBody>
       </p:sp>
@@ -6306,8 +6854,8 @@
         </p:nvSpPr>
         <p:spPr>
           <a:xfrm>
-            <a:off x="8503920" y="4709160"/>
-            <a:ext cx="800000" cy="300000"/>
+            <a:off x="566928" y="4700016"/>
+            <a:ext cx="914400" cy="274320"/>
           </a:xfrm>
           <a:prstGeom prst="rect">
             <a:avLst/>
@@ -6322,10 +6870,13 @@
           <a:bodyPr/>
           <a:lstStyle>
             <a:lvl1pPr>
-              <a:defRPr sz="1000">
-                <a:solidFill>
-                  <a:srgbClr val="6B7280"/>
-                </a:solidFill>
+              <a:defRPr sz="900">
+                <a:solidFill>
+                  <a:srgbClr val="5F6B76"/>
+                </a:solidFill>
+                <a:latin typeface="Corbel"/>
+                <a:ea typeface="Corbel"/>
+                <a:cs typeface="Corbel"/>
               </a:defRPr>
             </a:lvl1pPr>
           </a:lstStyle>
@@ -6372,8 +6923,8 @@
         </p:nvSpPr>
         <p:spPr>
           <a:xfrm>
-            <a:off x="502920" y="292608"/>
-            <a:ext cx="8046720" cy="228600"/>
+            <a:off x="566928" y="384048"/>
+            <a:ext cx="7772400" cy="237744"/>
           </a:xfrm>
           <a:prstGeom prst="rect">
             <a:avLst/>
@@ -6389,14 +6940,17 @@
               <a:buNone/>
             </a:pPr>
             <a:r>
-              <a:rPr lang="en-US" sz="1100" b="1" spc="150" kern="0" dirty="0">
-                <a:solidFill>
-                  <a:srgbClr val="00A86B"/>
-                </a:solidFill>
+              <a:rPr lang="en-US" sz="1000" spc="200" kern="0" dirty="0">
+                <a:solidFill>
+                  <a:srgbClr val="9A6A3C"/>
+                </a:solidFill>
+                <a:latin typeface="Corbel" pitchFamily="34" charset="0"/>
+                <a:ea typeface="Corbel" pitchFamily="34" charset="-122"/>
+                <a:cs typeface="Corbel" pitchFamily="34" charset="-120"/>
               </a:rPr>
               <a:t>UNIT 10</a:t>
             </a:r>
-            <a:endParaRPr lang="en-US" sz="1100" dirty="0"/>
+            <a:endParaRPr lang="en-US" sz="1000" dirty="0"/>
           </a:p>
         </p:txBody>
       </p:sp>
@@ -6408,8 +6962,8 @@
         </p:nvSpPr>
         <p:spPr>
           <a:xfrm>
-            <a:off x="502920" y="548640"/>
-            <a:ext cx="8046720" cy="548640"/>
+            <a:off x="566928" y="658368"/>
+            <a:ext cx="7772400" cy="658368"/>
           </a:xfrm>
           <a:prstGeom prst="rect">
             <a:avLst/>
@@ -6418,21 +6972,27 @@
           <a:ln/>
         </p:spPr>
         <p:txBody>
-          <a:bodyPr wrap="square" rtlCol="0" anchor="ctr"/>
+          <a:bodyPr wrap="square" rtlCol="0" anchor="t"/>
           <a:lstStyle/>
           <a:p>
             <a:pPr indent="0" marL="0">
+              <a:lnSpc>
+                <a:spcPct val="100000"/>
+              </a:lnSpc>
               <a:buNone/>
             </a:pPr>
             <a:r>
-              <a:rPr lang="en-US" sz="2400" b="1" dirty="0">
-                <a:solidFill>
-                  <a:srgbClr val="111827"/>
-                </a:solidFill>
+              <a:rPr lang="en-US" sz="2500" dirty="0">
+                <a:solidFill>
+                  <a:srgbClr val="1C3140"/>
+                </a:solidFill>
+                <a:latin typeface="Constantia" pitchFamily="34" charset="0"/>
+                <a:ea typeface="Constantia" pitchFamily="34" charset="-122"/>
+                <a:cs typeface="Constantia" pitchFamily="34" charset="-120"/>
               </a:rPr>
               <a:t>In practice</a:t>
             </a:r>
-            <a:endParaRPr lang="en-US" sz="2400" dirty="0"/>
+            <a:endParaRPr lang="en-US" sz="2500" dirty="0"/>
           </a:p>
         </p:txBody>
       </p:sp>
@@ -6444,28 +7004,48 @@
         </p:nvSpPr>
         <p:spPr>
           <a:xfrm>
-            <a:off x="502920" y="1280160"/>
-            <a:ext cx="54864" cy="2377440"/>
+            <a:off x="566928" y="1335024"/>
+            <a:ext cx="566928" cy="20117"/>
           </a:xfrm>
           <a:prstGeom prst="rect">
             <a:avLst/>
           </a:prstGeom>
           <a:solidFill>
-            <a:srgbClr val="00A86B"/>
+            <a:srgbClr val="9A6A3C"/>
           </a:solidFill>
           <a:ln/>
         </p:spPr>
       </p:sp>
       <p:sp>
         <p:nvSpPr>
-          <p:cNvPr id="5" name="Text 3"/>
+          <p:cNvPr id="5" name="Shape 3"/>
           <p:cNvSpPr/>
           <p:nvPr/>
         </p:nvSpPr>
         <p:spPr>
           <a:xfrm>
-            <a:off x="777240" y="1280160"/>
-            <a:ext cx="7589520" cy="2377440"/>
+            <a:off x="566928" y="1664208"/>
+            <a:ext cx="8010144" cy="2395728"/>
+          </a:xfrm>
+          <a:prstGeom prst="rect">
+            <a:avLst/>
+          </a:prstGeom>
+          <a:solidFill>
+            <a:srgbClr val="F6F4F0"/>
+          </a:solidFill>
+          <a:ln/>
+        </p:spPr>
+      </p:sp>
+      <p:sp>
+        <p:nvSpPr>
+          <p:cNvPr id="6" name="Text 4"/>
+          <p:cNvSpPr/>
+          <p:nvPr/>
+        </p:nvSpPr>
+        <p:spPr>
+          <a:xfrm>
+            <a:off x="932688" y="1847088"/>
+            <a:ext cx="7278624" cy="2029968"/>
           </a:xfrm>
           <a:prstGeom prst="rect">
             <a:avLst/>
@@ -6479,15 +7059,18 @@
           <a:p>
             <a:pPr indent="0" marL="0">
               <a:lnSpc>
-                <a:spcPct val="130000"/>
+                <a:spcPct val="132000"/>
               </a:lnSpc>
               <a:buNone/>
             </a:pPr>
             <a:r>
-              <a:rPr lang="en-US" sz="1600" dirty="0">
-                <a:solidFill>
-                  <a:srgbClr val="374151"/>
-                </a:solidFill>
+              <a:rPr lang="en-US" sz="1600" i="1" dirty="0">
+                <a:solidFill>
+                  <a:srgbClr val="1C3140"/>
+                </a:solidFill>
+                <a:latin typeface="Constantia" pitchFamily="34" charset="0"/>
+                <a:ea typeface="Constantia" pitchFamily="34" charset="-122"/>
+                <a:cs typeface="Constantia" pitchFamily="34" charset="-120"/>
               </a:rPr>
               <a:t>Reporting checklists are usually treated as a publication chore. Used at the proposal stage they function as a design checklist, and they surface the omissions reviewers would have found later.</a:t>
             </a:r>
@@ -6507,8 +7090,8 @@
         </p:nvSpPr>
         <p:spPr>
           <a:xfrm>
-            <a:off x="8503920" y="4709160"/>
-            <a:ext cx="800000" cy="300000"/>
+            <a:off x="566928" y="4700016"/>
+            <a:ext cx="914400" cy="274320"/>
           </a:xfrm>
           <a:prstGeom prst="rect">
             <a:avLst/>
@@ -6523,10 +7106,13 @@
           <a:bodyPr/>
           <a:lstStyle>
             <a:lvl1pPr>
-              <a:defRPr sz="1000">
-                <a:solidFill>
-                  <a:srgbClr val="6B7280"/>
-                </a:solidFill>
+              <a:defRPr sz="900">
+                <a:solidFill>
+                  <a:srgbClr val="5F6B76"/>
+                </a:solidFill>
+                <a:latin typeface="Corbel"/>
+                <a:ea typeface="Corbel"/>
+                <a:cs typeface="Corbel"/>
               </a:defRPr>
             </a:lvl1pPr>
           </a:lstStyle>
@@ -6573,8 +7159,8 @@
         </p:nvSpPr>
         <p:spPr>
           <a:xfrm>
-            <a:off x="502920" y="292608"/>
-            <a:ext cx="8046720" cy="228600"/>
+            <a:off x="566928" y="384048"/>
+            <a:ext cx="7772400" cy="237744"/>
           </a:xfrm>
           <a:prstGeom prst="rect">
             <a:avLst/>
@@ -6590,14 +7176,17 @@
               <a:buNone/>
             </a:pPr>
             <a:r>
-              <a:rPr lang="en-US" sz="1100" b="1" spc="150" kern="0" dirty="0">
-                <a:solidFill>
-                  <a:srgbClr val="0066CC"/>
-                </a:solidFill>
+              <a:rPr lang="en-US" sz="1000" spc="200" kern="0" dirty="0">
+                <a:solidFill>
+                  <a:srgbClr val="9A6A3C"/>
+                </a:solidFill>
+                <a:latin typeface="Corbel" pitchFamily="34" charset="0"/>
+                <a:ea typeface="Corbel" pitchFamily="34" charset="-122"/>
+                <a:cs typeface="Corbel" pitchFamily="34" charset="-120"/>
               </a:rPr>
               <a:t>UNIT 10</a:t>
             </a:r>
-            <a:endParaRPr lang="en-US" sz="1100" dirty="0"/>
+            <a:endParaRPr lang="en-US" sz="1000" dirty="0"/>
           </a:p>
         </p:txBody>
       </p:sp>
@@ -6609,8 +7198,8 @@
         </p:nvSpPr>
         <p:spPr>
           <a:xfrm>
-            <a:off x="502920" y="548640"/>
-            <a:ext cx="8046720" cy="640080"/>
+            <a:off x="566928" y="658368"/>
+            <a:ext cx="7772400" cy="658368"/>
           </a:xfrm>
           <a:prstGeom prst="rect">
             <a:avLst/>
@@ -6623,30 +7212,56 @@
           <a:lstStyle/>
           <a:p>
             <a:pPr indent="0" marL="0">
+              <a:lnSpc>
+                <a:spcPct val="100000"/>
+              </a:lnSpc>
               <a:buNone/>
             </a:pPr>
             <a:r>
-              <a:rPr lang="en-US" sz="2400" b="1" dirty="0">
-                <a:solidFill>
-                  <a:srgbClr val="111827"/>
-                </a:solidFill>
+              <a:rPr lang="en-US" sz="2500" dirty="0">
+                <a:solidFill>
+                  <a:srgbClr val="1C3140"/>
+                </a:solidFill>
+                <a:latin typeface="Constantia" pitchFamily="34" charset="0"/>
+                <a:ea typeface="Constantia" pitchFamily="34" charset="-122"/>
+                <a:cs typeface="Constantia" pitchFamily="34" charset="-120"/>
               </a:rPr>
               <a:t>Timeline, budget and feasibility (1/2)</a:t>
             </a:r>
-            <a:endParaRPr lang="en-US" sz="2400" dirty="0"/>
-          </a:p>
-        </p:txBody>
-      </p:sp>
-      <p:sp>
-        <p:nvSpPr>
-          <p:cNvPr id="4" name="Text 2"/>
+            <a:endParaRPr lang="en-US" sz="2500" dirty="0"/>
+          </a:p>
+        </p:txBody>
+      </p:sp>
+      <p:sp>
+        <p:nvSpPr>
+          <p:cNvPr id="4" name="Shape 2"/>
           <p:cNvSpPr/>
           <p:nvPr/>
         </p:nvSpPr>
         <p:spPr>
           <a:xfrm>
-            <a:off x="685800" y="1325880"/>
-            <a:ext cx="7772400" cy="3200400"/>
+            <a:off x="566928" y="1335024"/>
+            <a:ext cx="566928" cy="20117"/>
+          </a:xfrm>
+          <a:prstGeom prst="rect">
+            <a:avLst/>
+          </a:prstGeom>
+          <a:solidFill>
+            <a:srgbClr val="9A6A3C"/>
+          </a:solidFill>
+          <a:ln/>
+        </p:spPr>
+      </p:sp>
+      <p:sp>
+        <p:nvSpPr>
+          <p:cNvPr id="5" name="Text 3"/>
+          <p:cNvSpPr/>
+          <p:nvPr/>
+        </p:nvSpPr>
+        <p:spPr>
+          <a:xfrm>
+            <a:off x="713232" y="1664208"/>
+            <a:ext cx="7498080" cy="2788920"/>
           </a:xfrm>
           <a:prstGeom prst="rect">
             <a:avLst/>
@@ -6660,65 +7275,74 @@
           <a:p>
             <a:pPr marL="342900" indent="-342900">
               <a:lnSpc>
-                <a:spcPct val="125000"/>
+                <a:spcPct val="130000"/>
               </a:lnSpc>
               <a:spcAft>
-                <a:spcPts val="800"/>
+                <a:spcPts val="1100"/>
               </a:spcAft>
               <a:buSzPct val="100000"/>
-              <a:buChar char="•"/>
-            </a:pPr>
-            <a:r>
-              <a:rPr lang="en-US" sz="1300" dirty="0">
-                <a:solidFill>
-                  <a:srgbClr val="374151"/>
-                </a:solidFill>
+              <a:buChar char="–"/>
+            </a:pPr>
+            <a:r>
+              <a:rPr lang="en-US" sz="1350" dirty="0">
+                <a:solidFill>
+                  <a:srgbClr val="23282E"/>
+                </a:solidFill>
+                <a:latin typeface="Corbel" pitchFamily="34" charset="0"/>
+                <a:ea typeface="Corbel" pitchFamily="34" charset="-122"/>
+                <a:cs typeface="Corbel" pitchFamily="34" charset="-120"/>
               </a:rPr>
               <a:t>Build the timeline backwards from the deadline, and add contingency — ethical approval alone commonly takes one to three months</a:t>
             </a:r>
-            <a:endParaRPr lang="en-US" sz="1300" dirty="0"/>
+            <a:endParaRPr lang="en-US" sz="1350" dirty="0"/>
           </a:p>
           <a:p>
             <a:pPr marL="342900" indent="-342900">
               <a:lnSpc>
-                <a:spcPct val="125000"/>
+                <a:spcPct val="130000"/>
               </a:lnSpc>
               <a:spcAft>
-                <a:spcPts val="800"/>
+                <a:spcPts val="1100"/>
               </a:spcAft>
               <a:buSzPct val="100000"/>
-              <a:buChar char="•"/>
-            </a:pPr>
-            <a:r>
-              <a:rPr lang="en-US" sz="1300" dirty="0">
-                <a:solidFill>
-                  <a:srgbClr val="374151"/>
-                </a:solidFill>
+              <a:buChar char="–"/>
+            </a:pPr>
+            <a:r>
+              <a:rPr lang="en-US" sz="1350" dirty="0">
+                <a:solidFill>
+                  <a:srgbClr val="23282E"/>
+                </a:solidFill>
+                <a:latin typeface="Corbel" pitchFamily="34" charset="0"/>
+                <a:ea typeface="Corbel" pitchFamily="34" charset="-122"/>
+                <a:cs typeface="Corbel" pitchFamily="34" charset="-120"/>
               </a:rPr>
               <a:t>A Gantt chart makes dependencies visible: recruitment cannot begin before approval, analysis cannot begin before data cleaning</a:t>
             </a:r>
-            <a:endParaRPr lang="en-US" sz="1300" dirty="0"/>
+            <a:endParaRPr lang="en-US" sz="1350" dirty="0"/>
           </a:p>
           <a:p>
             <a:pPr marL="342900" indent="-342900">
               <a:lnSpc>
-                <a:spcPct val="125000"/>
+                <a:spcPct val="130000"/>
               </a:lnSpc>
               <a:spcAft>
-                <a:spcPts val="800"/>
+                <a:spcPts val="1100"/>
               </a:spcAft>
               <a:buSzPct val="100000"/>
-              <a:buChar char="•"/>
-            </a:pPr>
-            <a:r>
-              <a:rPr lang="en-US" sz="1300" dirty="0">
-                <a:solidFill>
-                  <a:srgbClr val="374151"/>
-                </a:solidFill>
+              <a:buChar char="–"/>
+            </a:pPr>
+            <a:r>
+              <a:rPr lang="en-US" sz="1350" dirty="0">
+                <a:solidFill>
+                  <a:srgbClr val="23282E"/>
+                </a:solidFill>
+                <a:latin typeface="Corbel" pitchFamily="34" charset="0"/>
+                <a:ea typeface="Corbel" pitchFamily="34" charset="-122"/>
+                <a:cs typeface="Corbel" pitchFamily="34" charset="-120"/>
               </a:rPr>
               <a:t>Budget lines typically include personnel, transport, materials, participant compensation, data collection tools, software, transcription and translation, dissemination</a:t>
             </a:r>
-            <a:endParaRPr lang="en-US" sz="1300" dirty="0"/>
+            <a:endParaRPr lang="en-US" sz="1350" dirty="0"/>
           </a:p>
         </p:txBody>
       </p:sp>
@@ -6734,8 +7358,8 @@
         </p:nvSpPr>
         <p:spPr>
           <a:xfrm>
-            <a:off x="8503920" y="4709160"/>
-            <a:ext cx="800000" cy="300000"/>
+            <a:off x="566928" y="4700016"/>
+            <a:ext cx="914400" cy="274320"/>
           </a:xfrm>
           <a:prstGeom prst="rect">
             <a:avLst/>
@@ -6750,10 +7374,13 @@
           <a:bodyPr/>
           <a:lstStyle>
             <a:lvl1pPr>
-              <a:defRPr sz="1000">
-                <a:solidFill>
-                  <a:srgbClr val="6B7280"/>
-                </a:solidFill>
+              <a:defRPr sz="900">
+                <a:solidFill>
+                  <a:srgbClr val="5F6B76"/>
+                </a:solidFill>
+                <a:latin typeface="Corbel"/>
+                <a:ea typeface="Corbel"/>
+                <a:cs typeface="Corbel"/>
               </a:defRPr>
             </a:lvl1pPr>
           </a:lstStyle>
@@ -6800,8 +7427,8 @@
         </p:nvSpPr>
         <p:spPr>
           <a:xfrm>
-            <a:off x="502920" y="292608"/>
-            <a:ext cx="8046720" cy="228600"/>
+            <a:off x="566928" y="384048"/>
+            <a:ext cx="7772400" cy="237744"/>
           </a:xfrm>
           <a:prstGeom prst="rect">
             <a:avLst/>
@@ -6817,14 +7444,17 @@
               <a:buNone/>
             </a:pPr>
             <a:r>
-              <a:rPr lang="en-US" sz="1100" b="1" spc="150" kern="0" dirty="0">
-                <a:solidFill>
-                  <a:srgbClr val="0066CC"/>
-                </a:solidFill>
+              <a:rPr lang="en-US" sz="1000" spc="200" kern="0" dirty="0">
+                <a:solidFill>
+                  <a:srgbClr val="9A6A3C"/>
+                </a:solidFill>
+                <a:latin typeface="Corbel" pitchFamily="34" charset="0"/>
+                <a:ea typeface="Corbel" pitchFamily="34" charset="-122"/>
+                <a:cs typeface="Corbel" pitchFamily="34" charset="-120"/>
               </a:rPr>
               <a:t>UNIT 10</a:t>
             </a:r>
-            <a:endParaRPr lang="en-US" sz="1100" dirty="0"/>
+            <a:endParaRPr lang="en-US" sz="1000" dirty="0"/>
           </a:p>
         </p:txBody>
       </p:sp>
@@ -6836,8 +7466,8 @@
         </p:nvSpPr>
         <p:spPr>
           <a:xfrm>
-            <a:off x="502920" y="548640"/>
-            <a:ext cx="8046720" cy="640080"/>
+            <a:off x="566928" y="658368"/>
+            <a:ext cx="7772400" cy="658368"/>
           </a:xfrm>
           <a:prstGeom prst="rect">
             <a:avLst/>
@@ -6850,30 +7480,56 @@
           <a:lstStyle/>
           <a:p>
             <a:pPr indent="0" marL="0">
+              <a:lnSpc>
+                <a:spcPct val="100000"/>
+              </a:lnSpc>
               <a:buNone/>
             </a:pPr>
             <a:r>
-              <a:rPr lang="en-US" sz="2400" b="1" dirty="0">
-                <a:solidFill>
-                  <a:srgbClr val="111827"/>
-                </a:solidFill>
+              <a:rPr lang="en-US" sz="2500" dirty="0">
+                <a:solidFill>
+                  <a:srgbClr val="1C3140"/>
+                </a:solidFill>
+                <a:latin typeface="Constantia" pitchFamily="34" charset="0"/>
+                <a:ea typeface="Constantia" pitchFamily="34" charset="-122"/>
+                <a:cs typeface="Constantia" pitchFamily="34" charset="-120"/>
               </a:rPr>
               <a:t>Timeline, budget and feasibility (2/2)</a:t>
             </a:r>
-            <a:endParaRPr lang="en-US" sz="2400" dirty="0"/>
-          </a:p>
-        </p:txBody>
-      </p:sp>
-      <p:sp>
-        <p:nvSpPr>
-          <p:cNvPr id="4" name="Text 2"/>
+            <a:endParaRPr lang="en-US" sz="2500" dirty="0"/>
+          </a:p>
+        </p:txBody>
+      </p:sp>
+      <p:sp>
+        <p:nvSpPr>
+          <p:cNvPr id="4" name="Shape 2"/>
           <p:cNvSpPr/>
           <p:nvPr/>
         </p:nvSpPr>
         <p:spPr>
           <a:xfrm>
-            <a:off x="685800" y="1325880"/>
-            <a:ext cx="7772400" cy="3200400"/>
+            <a:off x="566928" y="1335024"/>
+            <a:ext cx="566928" cy="20117"/>
+          </a:xfrm>
+          <a:prstGeom prst="rect">
+            <a:avLst/>
+          </a:prstGeom>
+          <a:solidFill>
+            <a:srgbClr val="9A6A3C"/>
+          </a:solidFill>
+          <a:ln/>
+        </p:spPr>
+      </p:sp>
+      <p:sp>
+        <p:nvSpPr>
+          <p:cNvPr id="5" name="Text 3"/>
+          <p:cNvSpPr/>
+          <p:nvPr/>
+        </p:nvSpPr>
+        <p:spPr>
+          <a:xfrm>
+            <a:off x="713232" y="1664208"/>
+            <a:ext cx="7498080" cy="2788920"/>
           </a:xfrm>
           <a:prstGeom prst="rect">
             <a:avLst/>
@@ -6887,65 +7543,74 @@
           <a:p>
             <a:pPr marL="342900" indent="-342900">
               <a:lnSpc>
-                <a:spcPct val="125000"/>
+                <a:spcPct val="130000"/>
               </a:lnSpc>
               <a:spcAft>
-                <a:spcPts val="800"/>
+                <a:spcPts val="1100"/>
               </a:spcAft>
               <a:buSzPct val="100000"/>
-              <a:buChar char="•"/>
-            </a:pPr>
-            <a:r>
-              <a:rPr lang="en-US" sz="1700" dirty="0">
-                <a:solidFill>
-                  <a:srgbClr val="374151"/>
-                </a:solidFill>
+              <a:buChar char="–"/>
+            </a:pPr>
+            <a:r>
+              <a:rPr lang="en-US" sz="1650" dirty="0">
+                <a:solidFill>
+                  <a:srgbClr val="23282E"/>
+                </a:solidFill>
+                <a:latin typeface="Corbel" pitchFamily="34" charset="0"/>
+                <a:ea typeface="Corbel" pitchFamily="34" charset="-122"/>
+                <a:cs typeface="Corbel" pitchFamily="34" charset="-120"/>
               </a:rPr>
               <a:t>Transcription is routinely underestimated — an hour of interview takes roughly four to six hours to transcribe</a:t>
             </a:r>
-            <a:endParaRPr lang="en-US" sz="1700" dirty="0"/>
+            <a:endParaRPr lang="en-US" sz="1650" dirty="0"/>
           </a:p>
           <a:p>
             <a:pPr marL="342900" indent="-342900">
               <a:lnSpc>
-                <a:spcPct val="125000"/>
+                <a:spcPct val="130000"/>
               </a:lnSpc>
               <a:spcAft>
-                <a:spcPts val="800"/>
+                <a:spcPts val="1100"/>
               </a:spcAft>
               <a:buSzPct val="100000"/>
-              <a:buChar char="•"/>
-            </a:pPr>
-            <a:r>
-              <a:rPr lang="en-US" sz="1700" dirty="0">
-                <a:solidFill>
-                  <a:srgbClr val="374151"/>
-                </a:solidFill>
+              <a:buChar char="–"/>
+            </a:pPr>
+            <a:r>
+              <a:rPr lang="en-US" sz="1650" dirty="0">
+                <a:solidFill>
+                  <a:srgbClr val="23282E"/>
+                </a:solidFill>
+                <a:latin typeface="Corbel" pitchFamily="34" charset="0"/>
+                <a:ea typeface="Corbel" pitchFamily="34" charset="-122"/>
+                <a:cs typeface="Corbel" pitchFamily="34" charset="-120"/>
               </a:rPr>
               <a:t>Justify every line; unexplained round numbers attract scrutiny</a:t>
             </a:r>
-            <a:endParaRPr lang="en-US" sz="1700" dirty="0"/>
+            <a:endParaRPr lang="en-US" sz="1650" dirty="0"/>
           </a:p>
           <a:p>
             <a:pPr marL="342900" indent="-342900">
               <a:lnSpc>
-                <a:spcPct val="125000"/>
+                <a:spcPct val="130000"/>
               </a:lnSpc>
               <a:spcAft>
-                <a:spcPts val="800"/>
+                <a:spcPts val="1100"/>
               </a:spcAft>
               <a:buSzPct val="100000"/>
-              <a:buChar char="•"/>
-            </a:pPr>
-            <a:r>
-              <a:rPr lang="en-US" sz="1700" dirty="0">
-                <a:solidFill>
-                  <a:srgbClr val="374151"/>
-                </a:solidFill>
+              <a:buChar char="–"/>
+            </a:pPr>
+            <a:r>
+              <a:rPr lang="en-US" sz="1650" dirty="0">
+                <a:solidFill>
+                  <a:srgbClr val="23282E"/>
+                </a:solidFill>
+                <a:latin typeface="Corbel" pitchFamily="34" charset="0"/>
+                <a:ea typeface="Corbel" pitchFamily="34" charset="-122"/>
+                <a:cs typeface="Corbel" pitchFamily="34" charset="-120"/>
               </a:rPr>
               <a:t>State what you will do if recruitment is slower than planned — reviewers ask</a:t>
             </a:r>
-            <a:endParaRPr lang="en-US" sz="1700" dirty="0"/>
+            <a:endParaRPr lang="en-US" sz="1650" dirty="0"/>
           </a:p>
         </p:txBody>
       </p:sp>
@@ -6961,8 +7626,8 @@
         </p:nvSpPr>
         <p:spPr>
           <a:xfrm>
-            <a:off x="8503920" y="4709160"/>
-            <a:ext cx="800000" cy="300000"/>
+            <a:off x="566928" y="4700016"/>
+            <a:ext cx="914400" cy="274320"/>
           </a:xfrm>
           <a:prstGeom prst="rect">
             <a:avLst/>
@@ -6977,10 +7642,13 @@
           <a:bodyPr/>
           <a:lstStyle>
             <a:lvl1pPr>
-              <a:defRPr sz="1000">
-                <a:solidFill>
-                  <a:srgbClr val="6B7280"/>
-                </a:solidFill>
+              <a:defRPr sz="900">
+                <a:solidFill>
+                  <a:srgbClr val="5F6B76"/>
+                </a:solidFill>
+                <a:latin typeface="Corbel"/>
+                <a:ea typeface="Corbel"/>
+                <a:cs typeface="Corbel"/>
               </a:defRPr>
             </a:lvl1pPr>
           </a:lstStyle>
@@ -7045,7 +7713,7 @@
     </a:clrScheme>
     <a:fontScheme name="Office">
       <a:majorFont>
-        <a:latin typeface="Calibri Light" panose="020F0302020204030204"/>
+        <a:latin typeface="Constantia"/>
         <a:ea typeface=""/>
         <a:cs typeface=""/>
         <a:font script="Jpan" typeface="游ゴシック Light"/>
@@ -7097,7 +7765,7 @@
         <a:font script="Tfng" typeface="Ebrima"/>
       </a:majorFont>
       <a:minorFont>
-        <a:latin typeface="Calibri" panose="020F0502020204030204"/>
+        <a:latin typeface="Corbel"/>
         <a:ea typeface=""/>
         <a:cs typeface=""/>
         <a:font script="Jpan" typeface="游ゴシック"/>
